--- a/img/shiny-how-to.pptx
+++ b/img/shiny-how-to.pptx
@@ -2,18 +2,18 @@
 <file path=ppt/presentation.xml><?xml version="1.0" encoding="utf-8"?>
 <p:presentation xmlns:a="http://schemas.openxmlformats.org/drawingml/2006/main" xmlns:r="http://schemas.openxmlformats.org/officeDocument/2006/relationships" xmlns:p="http://schemas.openxmlformats.org/presentationml/2006/main" saveSubsetFonts="1" autoCompressPictures="0">
   <p:sldMasterIdLst>
-    <p:sldMasterId id="2147483648" r:id="rId1"/>
+    <p:sldMasterId id="2147483660" r:id="rId1"/>
   </p:sldMasterIdLst>
   <p:sldIdLst>
     <p:sldId id="257" r:id="rId2"/>
   </p:sldIdLst>
-  <p:sldSz cx="12192000" cy="6858000"/>
+  <p:sldSz cx="9321800" cy="7315200"/>
   <p:notesSz cx="6858000" cy="9144000"/>
   <p:defaultTextStyle>
     <a:defPPr>
       <a:defRPr lang="en-US"/>
     </a:defPPr>
-    <a:lvl1pPr marL="0" algn="l" defTabSz="914400" rtl="0" eaLnBrk="1" latinLnBrk="0" hangingPunct="1">
+    <a:lvl1pPr marL="0" algn="l" defTabSz="457200" rtl="0" eaLnBrk="1" latinLnBrk="0" hangingPunct="1">
       <a:defRPr sz="1800" kern="1200">
         <a:solidFill>
           <a:schemeClr val="tx1"/>
@@ -23,7 +23,7 @@
         <a:cs typeface="+mn-cs"/>
       </a:defRPr>
     </a:lvl1pPr>
-    <a:lvl2pPr marL="457200" algn="l" defTabSz="914400" rtl="0" eaLnBrk="1" latinLnBrk="0" hangingPunct="1">
+    <a:lvl2pPr marL="457200" algn="l" defTabSz="457200" rtl="0" eaLnBrk="1" latinLnBrk="0" hangingPunct="1">
       <a:defRPr sz="1800" kern="1200">
         <a:solidFill>
           <a:schemeClr val="tx1"/>
@@ -33,7 +33,7 @@
         <a:cs typeface="+mn-cs"/>
       </a:defRPr>
     </a:lvl2pPr>
-    <a:lvl3pPr marL="914400" algn="l" defTabSz="914400" rtl="0" eaLnBrk="1" latinLnBrk="0" hangingPunct="1">
+    <a:lvl3pPr marL="914400" algn="l" defTabSz="457200" rtl="0" eaLnBrk="1" latinLnBrk="0" hangingPunct="1">
       <a:defRPr sz="1800" kern="1200">
         <a:solidFill>
           <a:schemeClr val="tx1"/>
@@ -43,7 +43,7 @@
         <a:cs typeface="+mn-cs"/>
       </a:defRPr>
     </a:lvl3pPr>
-    <a:lvl4pPr marL="1371600" algn="l" defTabSz="914400" rtl="0" eaLnBrk="1" latinLnBrk="0" hangingPunct="1">
+    <a:lvl4pPr marL="1371600" algn="l" defTabSz="457200" rtl="0" eaLnBrk="1" latinLnBrk="0" hangingPunct="1">
       <a:defRPr sz="1800" kern="1200">
         <a:solidFill>
           <a:schemeClr val="tx1"/>
@@ -53,7 +53,7 @@
         <a:cs typeface="+mn-cs"/>
       </a:defRPr>
     </a:lvl4pPr>
-    <a:lvl5pPr marL="1828800" algn="l" defTabSz="914400" rtl="0" eaLnBrk="1" latinLnBrk="0" hangingPunct="1">
+    <a:lvl5pPr marL="1828800" algn="l" defTabSz="457200" rtl="0" eaLnBrk="1" latinLnBrk="0" hangingPunct="1">
       <a:defRPr sz="1800" kern="1200">
         <a:solidFill>
           <a:schemeClr val="tx1"/>
@@ -63,7 +63,7 @@
         <a:cs typeface="+mn-cs"/>
       </a:defRPr>
     </a:lvl5pPr>
-    <a:lvl6pPr marL="2286000" algn="l" defTabSz="914400" rtl="0" eaLnBrk="1" latinLnBrk="0" hangingPunct="1">
+    <a:lvl6pPr marL="2286000" algn="l" defTabSz="457200" rtl="0" eaLnBrk="1" latinLnBrk="0" hangingPunct="1">
       <a:defRPr sz="1800" kern="1200">
         <a:solidFill>
           <a:schemeClr val="tx1"/>
@@ -73,7 +73,7 @@
         <a:cs typeface="+mn-cs"/>
       </a:defRPr>
     </a:lvl6pPr>
-    <a:lvl7pPr marL="2743200" algn="l" defTabSz="914400" rtl="0" eaLnBrk="1" latinLnBrk="0" hangingPunct="1">
+    <a:lvl7pPr marL="2743200" algn="l" defTabSz="457200" rtl="0" eaLnBrk="1" latinLnBrk="0" hangingPunct="1">
       <a:defRPr sz="1800" kern="1200">
         <a:solidFill>
           <a:schemeClr val="tx1"/>
@@ -83,7 +83,7 @@
         <a:cs typeface="+mn-cs"/>
       </a:defRPr>
     </a:lvl7pPr>
-    <a:lvl8pPr marL="3200400" algn="l" defTabSz="914400" rtl="0" eaLnBrk="1" latinLnBrk="0" hangingPunct="1">
+    <a:lvl8pPr marL="3200400" algn="l" defTabSz="457200" rtl="0" eaLnBrk="1" latinLnBrk="0" hangingPunct="1">
       <a:defRPr sz="1800" kern="1200">
         <a:solidFill>
           <a:schemeClr val="tx1"/>
@@ -93,7 +93,7 @@
         <a:cs typeface="+mn-cs"/>
       </a:defRPr>
     </a:lvl8pPr>
-    <a:lvl9pPr marL="3657600" algn="l" defTabSz="914400" rtl="0" eaLnBrk="1" latinLnBrk="0" hangingPunct="1">
+    <a:lvl9pPr marL="3657600" algn="l" defTabSz="457200" rtl="0" eaLnBrk="1" latinLnBrk="0" hangingPunct="1">
       <a:defRPr sz="1800" kern="1200">
         <a:solidFill>
           <a:schemeClr val="tx1"/>
@@ -104,6 +104,11 @@
       </a:defRPr>
     </a:lvl9pPr>
   </p:defaultTextStyle>
+  <p:extLst>
+    <p:ext uri="{EFAFB233-063F-42B5-8137-9DF3F51BA10A}">
+      <p15:sldGuideLst xmlns:p15="http://schemas.microsoft.com/office/powerpoint/2012/main"/>
+    </p:ext>
+  </p:extLst>
 </p:presentation>
 </file>
 
@@ -126,13 +131,7 @@
       </p:grpSpPr>
       <p:sp>
         <p:nvSpPr>
-          <p:cNvPr id="2" name="Title 1">
-            <a:extLst>
-              <a:ext uri="{FF2B5EF4-FFF2-40B4-BE49-F238E27FC236}">
-                <a16:creationId xmlns:a16="http://schemas.microsoft.com/office/drawing/2014/main" id="{76BA7727-A7AB-5F7C-A3AA-2833B7F847C9}"/>
-              </a:ext>
-            </a:extLst>
-          </p:cNvPr>
+          <p:cNvPr id="2" name="Title 1"/>
           <p:cNvSpPr>
             <a:spLocks noGrp="1"/>
           </p:cNvSpPr>
@@ -142,15 +141,15 @@
         </p:nvSpPr>
         <p:spPr>
           <a:xfrm>
-            <a:off x="1524000" y="1122363"/>
-            <a:ext cx="9144000" cy="2387600"/>
+            <a:off x="699135" y="1197187"/>
+            <a:ext cx="7923530" cy="2546773"/>
           </a:xfrm>
         </p:spPr>
         <p:txBody>
           <a:bodyPr anchor="b"/>
           <a:lstStyle>
             <a:lvl1pPr algn="ctr">
-              <a:defRPr sz="6000"/>
+              <a:defRPr sz="6116"/>
             </a:lvl1pPr>
           </a:lstStyle>
           <a:p>
@@ -158,18 +157,13 @@
               <a:rPr lang="en-US"/>
               <a:t>Click to edit Master title style</a:t>
             </a:r>
-          </a:p>
-        </p:txBody>
-      </p:sp>
-      <p:sp>
-        <p:nvSpPr>
-          <p:cNvPr id="3" name="Subtitle 2">
-            <a:extLst>
-              <a:ext uri="{FF2B5EF4-FFF2-40B4-BE49-F238E27FC236}">
-                <a16:creationId xmlns:a16="http://schemas.microsoft.com/office/drawing/2014/main" id="{9E49F43E-39DA-4E46-496F-2DAB0DD116DA}"/>
-              </a:ext>
-            </a:extLst>
-          </p:cNvPr>
+            <a:endParaRPr lang="en-US" dirty="0"/>
+          </a:p>
+        </p:txBody>
+      </p:sp>
+      <p:sp>
+        <p:nvSpPr>
+          <p:cNvPr id="3" name="Subtitle 2"/>
           <p:cNvSpPr>
             <a:spLocks noGrp="1"/>
           </p:cNvSpPr>
@@ -179,8 +173,8 @@
         </p:nvSpPr>
         <p:spPr>
           <a:xfrm>
-            <a:off x="1524000" y="3602038"/>
-            <a:ext cx="9144000" cy="1655762"/>
+            <a:off x="1165225" y="3842174"/>
+            <a:ext cx="6991350" cy="1766146"/>
           </a:xfrm>
         </p:spPr>
         <p:txBody>
@@ -188,39 +182,39 @@
           <a:lstStyle>
             <a:lvl1pPr marL="0" indent="0" algn="ctr">
               <a:buNone/>
-              <a:defRPr sz="2400"/>
+              <a:defRPr sz="2447"/>
             </a:lvl1pPr>
-            <a:lvl2pPr marL="457200" indent="0" algn="ctr">
-              <a:buNone/>
-              <a:defRPr sz="2000"/>
+            <a:lvl2pPr marL="466070" indent="0" algn="ctr">
+              <a:buNone/>
+              <a:defRPr sz="2039"/>
             </a:lvl2pPr>
-            <a:lvl3pPr marL="914400" indent="0" algn="ctr">
-              <a:buNone/>
-              <a:defRPr sz="1800"/>
+            <a:lvl3pPr marL="932139" indent="0" algn="ctr">
+              <a:buNone/>
+              <a:defRPr sz="1835"/>
             </a:lvl3pPr>
-            <a:lvl4pPr marL="1371600" indent="0" algn="ctr">
-              <a:buNone/>
-              <a:defRPr sz="1600"/>
+            <a:lvl4pPr marL="1398209" indent="0" algn="ctr">
+              <a:buNone/>
+              <a:defRPr sz="1631"/>
             </a:lvl4pPr>
-            <a:lvl5pPr marL="1828800" indent="0" algn="ctr">
-              <a:buNone/>
-              <a:defRPr sz="1600"/>
+            <a:lvl5pPr marL="1864279" indent="0" algn="ctr">
+              <a:buNone/>
+              <a:defRPr sz="1631"/>
             </a:lvl5pPr>
-            <a:lvl6pPr marL="2286000" indent="0" algn="ctr">
-              <a:buNone/>
-              <a:defRPr sz="1600"/>
+            <a:lvl6pPr marL="2330348" indent="0" algn="ctr">
+              <a:buNone/>
+              <a:defRPr sz="1631"/>
             </a:lvl6pPr>
-            <a:lvl7pPr marL="2743200" indent="0" algn="ctr">
-              <a:buNone/>
-              <a:defRPr sz="1600"/>
+            <a:lvl7pPr marL="2796418" indent="0" algn="ctr">
+              <a:buNone/>
+              <a:defRPr sz="1631"/>
             </a:lvl7pPr>
-            <a:lvl8pPr marL="3200400" indent="0" algn="ctr">
-              <a:buNone/>
-              <a:defRPr sz="1600"/>
+            <a:lvl8pPr marL="3262488" indent="0" algn="ctr">
+              <a:buNone/>
+              <a:defRPr sz="1631"/>
             </a:lvl8pPr>
-            <a:lvl9pPr marL="3657600" indent="0" algn="ctr">
-              <a:buNone/>
-              <a:defRPr sz="1600"/>
+            <a:lvl9pPr marL="3728557" indent="0" algn="ctr">
+              <a:buNone/>
+              <a:defRPr sz="1631"/>
             </a:lvl9pPr>
           </a:lstStyle>
           <a:p>
@@ -228,18 +222,13 @@
               <a:rPr lang="en-US"/>
               <a:t>Click to edit Master subtitle style</a:t>
             </a:r>
-          </a:p>
-        </p:txBody>
-      </p:sp>
-      <p:sp>
-        <p:nvSpPr>
-          <p:cNvPr id="4" name="Date Placeholder 3">
-            <a:extLst>
-              <a:ext uri="{FF2B5EF4-FFF2-40B4-BE49-F238E27FC236}">
-                <a16:creationId xmlns:a16="http://schemas.microsoft.com/office/drawing/2014/main" id="{5A208920-6B41-3997-7948-EEB81E963B48}"/>
-              </a:ext>
-            </a:extLst>
-          </p:cNvPr>
+            <a:endParaRPr lang="en-US" dirty="0"/>
+          </a:p>
+        </p:txBody>
+      </p:sp>
+      <p:sp>
+        <p:nvSpPr>
+          <p:cNvPr id="4" name="Date Placeholder 3"/>
           <p:cNvSpPr>
             <a:spLocks noGrp="1"/>
           </p:cNvSpPr>
@@ -254,7 +243,7 @@
           <a:p>
             <a:fld id="{D875D722-DF1E-D743-9707-4C36F8FB2F91}" type="datetimeFigureOut">
               <a:rPr lang="en-US" smtClean="0"/>
-              <a:t>9/22/23</a:t>
+              <a:t>7/17/25</a:t>
             </a:fld>
             <a:endParaRPr lang="en-US"/>
           </a:p>
@@ -262,13 +251,7 @@
       </p:sp>
       <p:sp>
         <p:nvSpPr>
-          <p:cNvPr id="5" name="Footer Placeholder 4">
-            <a:extLst>
-              <a:ext uri="{FF2B5EF4-FFF2-40B4-BE49-F238E27FC236}">
-                <a16:creationId xmlns:a16="http://schemas.microsoft.com/office/drawing/2014/main" id="{9A2D6333-282B-EBD9-E81E-4ACBDF89AE6A}"/>
-              </a:ext>
-            </a:extLst>
-          </p:cNvPr>
+          <p:cNvPr id="5" name="Footer Placeholder 4"/>
           <p:cNvSpPr>
             <a:spLocks noGrp="1"/>
           </p:cNvSpPr>
@@ -287,13 +270,7 @@
       </p:sp>
       <p:sp>
         <p:nvSpPr>
-          <p:cNvPr id="6" name="Slide Number Placeholder 5">
-            <a:extLst>
-              <a:ext uri="{FF2B5EF4-FFF2-40B4-BE49-F238E27FC236}">
-                <a16:creationId xmlns:a16="http://schemas.microsoft.com/office/drawing/2014/main" id="{A338491C-5EFE-834A-51D1-896D03F1EA26}"/>
-              </a:ext>
-            </a:extLst>
-          </p:cNvPr>
+          <p:cNvPr id="6" name="Slide Number Placeholder 5"/>
           <p:cNvSpPr>
             <a:spLocks noGrp="1"/>
           </p:cNvSpPr>
@@ -317,7 +294,7 @@
     </p:spTree>
     <p:extLst>
       <p:ext uri="{BB962C8B-B14F-4D97-AF65-F5344CB8AC3E}">
-        <p14:creationId xmlns:p14="http://schemas.microsoft.com/office/powerpoint/2010/main" val="3976096138"/>
+        <p14:creationId xmlns:p14="http://schemas.microsoft.com/office/powerpoint/2010/main" val="2298975791"/>
       </p:ext>
     </p:extLst>
   </p:cSld>
@@ -346,13 +323,7 @@
       </p:grpSpPr>
       <p:sp>
         <p:nvSpPr>
-          <p:cNvPr id="2" name="Title 1">
-            <a:extLst>
-              <a:ext uri="{FF2B5EF4-FFF2-40B4-BE49-F238E27FC236}">
-                <a16:creationId xmlns:a16="http://schemas.microsoft.com/office/drawing/2014/main" id="{292411A7-CC67-F888-A472-D1A2FD2F0B73}"/>
-              </a:ext>
-            </a:extLst>
-          </p:cNvPr>
+          <p:cNvPr id="2" name="Title 1"/>
           <p:cNvSpPr>
             <a:spLocks noGrp="1"/>
           </p:cNvSpPr>
@@ -369,18 +340,13 @@
               <a:rPr lang="en-US"/>
               <a:t>Click to edit Master title style</a:t>
             </a:r>
-          </a:p>
-        </p:txBody>
-      </p:sp>
-      <p:sp>
-        <p:nvSpPr>
-          <p:cNvPr id="3" name="Vertical Text Placeholder 2">
-            <a:extLst>
-              <a:ext uri="{FF2B5EF4-FFF2-40B4-BE49-F238E27FC236}">
-                <a16:creationId xmlns:a16="http://schemas.microsoft.com/office/drawing/2014/main" id="{442A5D5C-F70F-A2B8-0B94-E1C62225DAE9}"/>
-              </a:ext>
-            </a:extLst>
-          </p:cNvPr>
+            <a:endParaRPr lang="en-US" dirty="0"/>
+          </a:p>
+        </p:txBody>
+      </p:sp>
+      <p:sp>
+        <p:nvSpPr>
+          <p:cNvPr id="3" name="Vertical Text Placeholder 2"/>
           <p:cNvSpPr>
             <a:spLocks noGrp="1"/>
           </p:cNvSpPr>
@@ -426,18 +392,13 @@
               <a:rPr lang="en-US"/>
               <a:t>Fifth level</a:t>
             </a:r>
-          </a:p>
-        </p:txBody>
-      </p:sp>
-      <p:sp>
-        <p:nvSpPr>
-          <p:cNvPr id="4" name="Date Placeholder 3">
-            <a:extLst>
-              <a:ext uri="{FF2B5EF4-FFF2-40B4-BE49-F238E27FC236}">
-                <a16:creationId xmlns:a16="http://schemas.microsoft.com/office/drawing/2014/main" id="{A6C4D3B8-F51D-9BCB-12D5-4887146ACD2A}"/>
-              </a:ext>
-            </a:extLst>
-          </p:cNvPr>
+            <a:endParaRPr lang="en-US" dirty="0"/>
+          </a:p>
+        </p:txBody>
+      </p:sp>
+      <p:sp>
+        <p:nvSpPr>
+          <p:cNvPr id="4" name="Date Placeholder 3"/>
           <p:cNvSpPr>
             <a:spLocks noGrp="1"/>
           </p:cNvSpPr>
@@ -452,7 +413,7 @@
           <a:p>
             <a:fld id="{D875D722-DF1E-D743-9707-4C36F8FB2F91}" type="datetimeFigureOut">
               <a:rPr lang="en-US" smtClean="0"/>
-              <a:t>9/22/23</a:t>
+              <a:t>7/17/25</a:t>
             </a:fld>
             <a:endParaRPr lang="en-US"/>
           </a:p>
@@ -460,13 +421,7 @@
       </p:sp>
       <p:sp>
         <p:nvSpPr>
-          <p:cNvPr id="5" name="Footer Placeholder 4">
-            <a:extLst>
-              <a:ext uri="{FF2B5EF4-FFF2-40B4-BE49-F238E27FC236}">
-                <a16:creationId xmlns:a16="http://schemas.microsoft.com/office/drawing/2014/main" id="{96619C15-7DEC-E866-13CB-9D266C0B070B}"/>
-              </a:ext>
-            </a:extLst>
-          </p:cNvPr>
+          <p:cNvPr id="5" name="Footer Placeholder 4"/>
           <p:cNvSpPr>
             <a:spLocks noGrp="1"/>
           </p:cNvSpPr>
@@ -485,13 +440,7 @@
       </p:sp>
       <p:sp>
         <p:nvSpPr>
-          <p:cNvPr id="6" name="Slide Number Placeholder 5">
-            <a:extLst>
-              <a:ext uri="{FF2B5EF4-FFF2-40B4-BE49-F238E27FC236}">
-                <a16:creationId xmlns:a16="http://schemas.microsoft.com/office/drawing/2014/main" id="{3D7C40B1-F707-7485-6727-8179AD85FC04}"/>
-              </a:ext>
-            </a:extLst>
-          </p:cNvPr>
+          <p:cNvPr id="6" name="Slide Number Placeholder 5"/>
           <p:cNvSpPr>
             <a:spLocks noGrp="1"/>
           </p:cNvSpPr>
@@ -515,7 +464,7 @@
     </p:spTree>
     <p:extLst>
       <p:ext uri="{BB962C8B-B14F-4D97-AF65-F5344CB8AC3E}">
-        <p14:creationId xmlns:p14="http://schemas.microsoft.com/office/powerpoint/2010/main" val="423848005"/>
+        <p14:creationId xmlns:p14="http://schemas.microsoft.com/office/powerpoint/2010/main" val="2479402708"/>
       </p:ext>
     </p:extLst>
   </p:cSld>
@@ -544,13 +493,7 @@
       </p:grpSpPr>
       <p:sp>
         <p:nvSpPr>
-          <p:cNvPr id="2" name="Vertical Title 1">
-            <a:extLst>
-              <a:ext uri="{FF2B5EF4-FFF2-40B4-BE49-F238E27FC236}">
-                <a16:creationId xmlns:a16="http://schemas.microsoft.com/office/drawing/2014/main" id="{25E27F84-C970-5CE6-A2BE-E98501464806}"/>
-              </a:ext>
-            </a:extLst>
-          </p:cNvPr>
+          <p:cNvPr id="2" name="Vertical Title 1"/>
           <p:cNvSpPr>
             <a:spLocks noGrp="1"/>
           </p:cNvSpPr>
@@ -560,8 +503,8 @@
         </p:nvSpPr>
         <p:spPr>
           <a:xfrm>
-            <a:off x="8724900" y="365125"/>
-            <a:ext cx="2628900" cy="5811838"/>
+            <a:off x="6670914" y="389467"/>
+            <a:ext cx="2010013" cy="6199294"/>
           </a:xfrm>
         </p:spPr>
         <p:txBody>
@@ -572,18 +515,13 @@
               <a:rPr lang="en-US"/>
               <a:t>Click to edit Master title style</a:t>
             </a:r>
-          </a:p>
-        </p:txBody>
-      </p:sp>
-      <p:sp>
-        <p:nvSpPr>
-          <p:cNvPr id="3" name="Vertical Text Placeholder 2">
-            <a:extLst>
-              <a:ext uri="{FF2B5EF4-FFF2-40B4-BE49-F238E27FC236}">
-                <a16:creationId xmlns:a16="http://schemas.microsoft.com/office/drawing/2014/main" id="{8D3C6393-0286-B945-E135-4199D2920935}"/>
-              </a:ext>
-            </a:extLst>
-          </p:cNvPr>
+            <a:endParaRPr lang="en-US" dirty="0"/>
+          </a:p>
+        </p:txBody>
+      </p:sp>
+      <p:sp>
+        <p:nvSpPr>
+          <p:cNvPr id="3" name="Vertical Text Placeholder 2"/>
           <p:cNvSpPr>
             <a:spLocks noGrp="1"/>
           </p:cNvSpPr>
@@ -593,8 +531,8 @@
         </p:nvSpPr>
         <p:spPr>
           <a:xfrm>
-            <a:off x="838200" y="365125"/>
-            <a:ext cx="7734300" cy="5811838"/>
+            <a:off x="640874" y="389467"/>
+            <a:ext cx="5913517" cy="6199294"/>
           </a:xfrm>
         </p:spPr>
         <p:txBody>
@@ -634,18 +572,13 @@
               <a:rPr lang="en-US"/>
               <a:t>Fifth level</a:t>
             </a:r>
-          </a:p>
-        </p:txBody>
-      </p:sp>
-      <p:sp>
-        <p:nvSpPr>
-          <p:cNvPr id="4" name="Date Placeholder 3">
-            <a:extLst>
-              <a:ext uri="{FF2B5EF4-FFF2-40B4-BE49-F238E27FC236}">
-                <a16:creationId xmlns:a16="http://schemas.microsoft.com/office/drawing/2014/main" id="{D612D7A7-9FB5-ABA0-DA08-5B70C24419D2}"/>
-              </a:ext>
-            </a:extLst>
-          </p:cNvPr>
+            <a:endParaRPr lang="en-US" dirty="0"/>
+          </a:p>
+        </p:txBody>
+      </p:sp>
+      <p:sp>
+        <p:nvSpPr>
+          <p:cNvPr id="4" name="Date Placeholder 3"/>
           <p:cNvSpPr>
             <a:spLocks noGrp="1"/>
           </p:cNvSpPr>
@@ -660,7 +593,7 @@
           <a:p>
             <a:fld id="{D875D722-DF1E-D743-9707-4C36F8FB2F91}" type="datetimeFigureOut">
               <a:rPr lang="en-US" smtClean="0"/>
-              <a:t>9/22/23</a:t>
+              <a:t>7/17/25</a:t>
             </a:fld>
             <a:endParaRPr lang="en-US"/>
           </a:p>
@@ -668,13 +601,7 @@
       </p:sp>
       <p:sp>
         <p:nvSpPr>
-          <p:cNvPr id="5" name="Footer Placeholder 4">
-            <a:extLst>
-              <a:ext uri="{FF2B5EF4-FFF2-40B4-BE49-F238E27FC236}">
-                <a16:creationId xmlns:a16="http://schemas.microsoft.com/office/drawing/2014/main" id="{8B7F904F-4870-6744-7B29-700D968EE672}"/>
-              </a:ext>
-            </a:extLst>
-          </p:cNvPr>
+          <p:cNvPr id="5" name="Footer Placeholder 4"/>
           <p:cNvSpPr>
             <a:spLocks noGrp="1"/>
           </p:cNvSpPr>
@@ -693,13 +620,7 @@
       </p:sp>
       <p:sp>
         <p:nvSpPr>
-          <p:cNvPr id="6" name="Slide Number Placeholder 5">
-            <a:extLst>
-              <a:ext uri="{FF2B5EF4-FFF2-40B4-BE49-F238E27FC236}">
-                <a16:creationId xmlns:a16="http://schemas.microsoft.com/office/drawing/2014/main" id="{762E5F2B-56E0-823F-E01D-315B347C9F07}"/>
-              </a:ext>
-            </a:extLst>
-          </p:cNvPr>
+          <p:cNvPr id="6" name="Slide Number Placeholder 5"/>
           <p:cNvSpPr>
             <a:spLocks noGrp="1"/>
           </p:cNvSpPr>
@@ -723,7 +644,7 @@
     </p:spTree>
     <p:extLst>
       <p:ext uri="{BB962C8B-B14F-4D97-AF65-F5344CB8AC3E}">
-        <p14:creationId xmlns:p14="http://schemas.microsoft.com/office/powerpoint/2010/main" val="3145683045"/>
+        <p14:creationId xmlns:p14="http://schemas.microsoft.com/office/powerpoint/2010/main" val="1201354073"/>
       </p:ext>
     </p:extLst>
   </p:cSld>
@@ -752,13 +673,7 @@
       </p:grpSpPr>
       <p:sp>
         <p:nvSpPr>
-          <p:cNvPr id="2" name="Title 1">
-            <a:extLst>
-              <a:ext uri="{FF2B5EF4-FFF2-40B4-BE49-F238E27FC236}">
-                <a16:creationId xmlns:a16="http://schemas.microsoft.com/office/drawing/2014/main" id="{1EC95F9C-7D1F-3E64-2491-2E0204C5123D}"/>
-              </a:ext>
-            </a:extLst>
-          </p:cNvPr>
+          <p:cNvPr id="2" name="Title 1"/>
           <p:cNvSpPr>
             <a:spLocks noGrp="1"/>
           </p:cNvSpPr>
@@ -775,18 +690,13 @@
               <a:rPr lang="en-US"/>
               <a:t>Click to edit Master title style</a:t>
             </a:r>
-          </a:p>
-        </p:txBody>
-      </p:sp>
-      <p:sp>
-        <p:nvSpPr>
-          <p:cNvPr id="3" name="Content Placeholder 2">
-            <a:extLst>
-              <a:ext uri="{FF2B5EF4-FFF2-40B4-BE49-F238E27FC236}">
-                <a16:creationId xmlns:a16="http://schemas.microsoft.com/office/drawing/2014/main" id="{2B7C06AC-97C3-6E07-968C-1E269A6DD2C3}"/>
-              </a:ext>
-            </a:extLst>
-          </p:cNvPr>
+            <a:endParaRPr lang="en-US" dirty="0"/>
+          </a:p>
+        </p:txBody>
+      </p:sp>
+      <p:sp>
+        <p:nvSpPr>
+          <p:cNvPr id="3" name="Content Placeholder 2"/>
           <p:cNvSpPr>
             <a:spLocks noGrp="1"/>
           </p:cNvSpPr>
@@ -832,18 +742,13 @@
               <a:rPr lang="en-US"/>
               <a:t>Fifth level</a:t>
             </a:r>
-          </a:p>
-        </p:txBody>
-      </p:sp>
-      <p:sp>
-        <p:nvSpPr>
-          <p:cNvPr id="4" name="Date Placeholder 3">
-            <a:extLst>
-              <a:ext uri="{FF2B5EF4-FFF2-40B4-BE49-F238E27FC236}">
-                <a16:creationId xmlns:a16="http://schemas.microsoft.com/office/drawing/2014/main" id="{69CA93B2-AAC5-7292-21F9-1C0AC087A646}"/>
-              </a:ext>
-            </a:extLst>
-          </p:cNvPr>
+            <a:endParaRPr lang="en-US" dirty="0"/>
+          </a:p>
+        </p:txBody>
+      </p:sp>
+      <p:sp>
+        <p:nvSpPr>
+          <p:cNvPr id="4" name="Date Placeholder 3"/>
           <p:cNvSpPr>
             <a:spLocks noGrp="1"/>
           </p:cNvSpPr>
@@ -858,7 +763,7 @@
           <a:p>
             <a:fld id="{D875D722-DF1E-D743-9707-4C36F8FB2F91}" type="datetimeFigureOut">
               <a:rPr lang="en-US" smtClean="0"/>
-              <a:t>9/22/23</a:t>
+              <a:t>7/17/25</a:t>
             </a:fld>
             <a:endParaRPr lang="en-US"/>
           </a:p>
@@ -866,13 +771,7 @@
       </p:sp>
       <p:sp>
         <p:nvSpPr>
-          <p:cNvPr id="5" name="Footer Placeholder 4">
-            <a:extLst>
-              <a:ext uri="{FF2B5EF4-FFF2-40B4-BE49-F238E27FC236}">
-                <a16:creationId xmlns:a16="http://schemas.microsoft.com/office/drawing/2014/main" id="{F7043A34-E3B2-2C4E-9557-F98220230C37}"/>
-              </a:ext>
-            </a:extLst>
-          </p:cNvPr>
+          <p:cNvPr id="5" name="Footer Placeholder 4"/>
           <p:cNvSpPr>
             <a:spLocks noGrp="1"/>
           </p:cNvSpPr>
@@ -891,13 +790,7 @@
       </p:sp>
       <p:sp>
         <p:nvSpPr>
-          <p:cNvPr id="6" name="Slide Number Placeholder 5">
-            <a:extLst>
-              <a:ext uri="{FF2B5EF4-FFF2-40B4-BE49-F238E27FC236}">
-                <a16:creationId xmlns:a16="http://schemas.microsoft.com/office/drawing/2014/main" id="{0D3BEB86-6FF9-36B4-FC3D-01BE9654F980}"/>
-              </a:ext>
-            </a:extLst>
-          </p:cNvPr>
+          <p:cNvPr id="6" name="Slide Number Placeholder 5"/>
           <p:cNvSpPr>
             <a:spLocks noGrp="1"/>
           </p:cNvSpPr>
@@ -921,7 +814,7 @@
     </p:spTree>
     <p:extLst>
       <p:ext uri="{BB962C8B-B14F-4D97-AF65-F5344CB8AC3E}">
-        <p14:creationId xmlns:p14="http://schemas.microsoft.com/office/powerpoint/2010/main" val="2710531860"/>
+        <p14:creationId xmlns:p14="http://schemas.microsoft.com/office/powerpoint/2010/main" val="340009749"/>
       </p:ext>
     </p:extLst>
   </p:cSld>
@@ -950,13 +843,7 @@
       </p:grpSpPr>
       <p:sp>
         <p:nvSpPr>
-          <p:cNvPr id="2" name="Title 1">
-            <a:extLst>
-              <a:ext uri="{FF2B5EF4-FFF2-40B4-BE49-F238E27FC236}">
-                <a16:creationId xmlns:a16="http://schemas.microsoft.com/office/drawing/2014/main" id="{C1E84EBF-288B-9A38-6D89-5F24A20D51B6}"/>
-              </a:ext>
-            </a:extLst>
-          </p:cNvPr>
+          <p:cNvPr id="2" name="Title 1"/>
           <p:cNvSpPr>
             <a:spLocks noGrp="1"/>
           </p:cNvSpPr>
@@ -966,15 +853,15 @@
         </p:nvSpPr>
         <p:spPr>
           <a:xfrm>
-            <a:off x="831850" y="1709738"/>
-            <a:ext cx="10515600" cy="2852737"/>
+            <a:off x="636019" y="1823722"/>
+            <a:ext cx="8040053" cy="3042919"/>
           </a:xfrm>
         </p:spPr>
         <p:txBody>
           <a:bodyPr anchor="b"/>
           <a:lstStyle>
             <a:lvl1pPr>
-              <a:defRPr sz="6000"/>
+              <a:defRPr sz="6116"/>
             </a:lvl1pPr>
           </a:lstStyle>
           <a:p>
@@ -982,18 +869,13 @@
               <a:rPr lang="en-US"/>
               <a:t>Click to edit Master title style</a:t>
             </a:r>
-          </a:p>
-        </p:txBody>
-      </p:sp>
-      <p:sp>
-        <p:nvSpPr>
-          <p:cNvPr id="3" name="Text Placeholder 2">
-            <a:extLst>
-              <a:ext uri="{FF2B5EF4-FFF2-40B4-BE49-F238E27FC236}">
-                <a16:creationId xmlns:a16="http://schemas.microsoft.com/office/drawing/2014/main" id="{1D9C34E0-B171-ABA5-529E-3D09258719E7}"/>
-              </a:ext>
-            </a:extLst>
-          </p:cNvPr>
+            <a:endParaRPr lang="en-US" dirty="0"/>
+          </a:p>
+        </p:txBody>
+      </p:sp>
+      <p:sp>
+        <p:nvSpPr>
+          <p:cNvPr id="3" name="Text Placeholder 2"/>
           <p:cNvSpPr>
             <a:spLocks noGrp="1"/>
           </p:cNvSpPr>
@@ -1003,8 +885,8 @@
         </p:nvSpPr>
         <p:spPr>
           <a:xfrm>
-            <a:off x="831850" y="4589463"/>
-            <a:ext cx="10515600" cy="1500187"/>
+            <a:off x="636019" y="4895429"/>
+            <a:ext cx="8040053" cy="1600199"/>
           </a:xfrm>
         </p:spPr>
         <p:txBody>
@@ -1012,17 +894,15 @@
           <a:lstStyle>
             <a:lvl1pPr marL="0" indent="0">
               <a:buNone/>
-              <a:defRPr sz="2400">
+              <a:defRPr sz="2447">
                 <a:solidFill>
-                  <a:schemeClr val="tx1">
-                    <a:tint val="75000"/>
-                  </a:schemeClr>
+                  <a:schemeClr val="tx1"/>
                 </a:solidFill>
               </a:defRPr>
             </a:lvl1pPr>
-            <a:lvl2pPr marL="457200" indent="0">
-              <a:buNone/>
-              <a:defRPr sz="2000">
+            <a:lvl2pPr marL="466070" indent="0">
+              <a:buNone/>
+              <a:defRPr sz="2039">
                 <a:solidFill>
                   <a:schemeClr val="tx1">
                     <a:tint val="75000"/>
@@ -1030,9 +910,9 @@
                 </a:solidFill>
               </a:defRPr>
             </a:lvl2pPr>
-            <a:lvl3pPr marL="914400" indent="0">
-              <a:buNone/>
-              <a:defRPr sz="1800">
+            <a:lvl3pPr marL="932139" indent="0">
+              <a:buNone/>
+              <a:defRPr sz="1835">
                 <a:solidFill>
                   <a:schemeClr val="tx1">
                     <a:tint val="75000"/>
@@ -1040,9 +920,9 @@
                 </a:solidFill>
               </a:defRPr>
             </a:lvl3pPr>
-            <a:lvl4pPr marL="1371600" indent="0">
-              <a:buNone/>
-              <a:defRPr sz="1600">
+            <a:lvl4pPr marL="1398209" indent="0">
+              <a:buNone/>
+              <a:defRPr sz="1631">
                 <a:solidFill>
                   <a:schemeClr val="tx1">
                     <a:tint val="75000"/>
@@ -1050,9 +930,9 @@
                 </a:solidFill>
               </a:defRPr>
             </a:lvl4pPr>
-            <a:lvl5pPr marL="1828800" indent="0">
-              <a:buNone/>
-              <a:defRPr sz="1600">
+            <a:lvl5pPr marL="1864279" indent="0">
+              <a:buNone/>
+              <a:defRPr sz="1631">
                 <a:solidFill>
                   <a:schemeClr val="tx1">
                     <a:tint val="75000"/>
@@ -1060,9 +940,9 @@
                 </a:solidFill>
               </a:defRPr>
             </a:lvl5pPr>
-            <a:lvl6pPr marL="2286000" indent="0">
-              <a:buNone/>
-              <a:defRPr sz="1600">
+            <a:lvl6pPr marL="2330348" indent="0">
+              <a:buNone/>
+              <a:defRPr sz="1631">
                 <a:solidFill>
                   <a:schemeClr val="tx1">
                     <a:tint val="75000"/>
@@ -1070,9 +950,9 @@
                 </a:solidFill>
               </a:defRPr>
             </a:lvl6pPr>
-            <a:lvl7pPr marL="2743200" indent="0">
-              <a:buNone/>
-              <a:defRPr sz="1600">
+            <a:lvl7pPr marL="2796418" indent="0">
+              <a:buNone/>
+              <a:defRPr sz="1631">
                 <a:solidFill>
                   <a:schemeClr val="tx1">
                     <a:tint val="75000"/>
@@ -1080,9 +960,9 @@
                 </a:solidFill>
               </a:defRPr>
             </a:lvl7pPr>
-            <a:lvl8pPr marL="3200400" indent="0">
-              <a:buNone/>
-              <a:defRPr sz="1600">
+            <a:lvl8pPr marL="3262488" indent="0">
+              <a:buNone/>
+              <a:defRPr sz="1631">
                 <a:solidFill>
                   <a:schemeClr val="tx1">
                     <a:tint val="75000"/>
@@ -1090,9 +970,9 @@
                 </a:solidFill>
               </a:defRPr>
             </a:lvl8pPr>
-            <a:lvl9pPr marL="3657600" indent="0">
-              <a:buNone/>
-              <a:defRPr sz="1600">
+            <a:lvl9pPr marL="3728557" indent="0">
+              <a:buNone/>
+              <a:defRPr sz="1631">
                 <a:solidFill>
                   <a:schemeClr val="tx1">
                     <a:tint val="75000"/>
@@ -1112,13 +992,7 @@
       </p:sp>
       <p:sp>
         <p:nvSpPr>
-          <p:cNvPr id="4" name="Date Placeholder 3">
-            <a:extLst>
-              <a:ext uri="{FF2B5EF4-FFF2-40B4-BE49-F238E27FC236}">
-                <a16:creationId xmlns:a16="http://schemas.microsoft.com/office/drawing/2014/main" id="{64D781AF-8294-BA7B-FE57-3C83A61125D2}"/>
-              </a:ext>
-            </a:extLst>
-          </p:cNvPr>
+          <p:cNvPr id="4" name="Date Placeholder 3"/>
           <p:cNvSpPr>
             <a:spLocks noGrp="1"/>
           </p:cNvSpPr>
@@ -1133,7 +1007,7 @@
           <a:p>
             <a:fld id="{D875D722-DF1E-D743-9707-4C36F8FB2F91}" type="datetimeFigureOut">
               <a:rPr lang="en-US" smtClean="0"/>
-              <a:t>9/22/23</a:t>
+              <a:t>7/17/25</a:t>
             </a:fld>
             <a:endParaRPr lang="en-US"/>
           </a:p>
@@ -1141,13 +1015,7 @@
       </p:sp>
       <p:sp>
         <p:nvSpPr>
-          <p:cNvPr id="5" name="Footer Placeholder 4">
-            <a:extLst>
-              <a:ext uri="{FF2B5EF4-FFF2-40B4-BE49-F238E27FC236}">
-                <a16:creationId xmlns:a16="http://schemas.microsoft.com/office/drawing/2014/main" id="{8D0ACAC1-BDE0-2440-36A1-6DAAC4E51A99}"/>
-              </a:ext>
-            </a:extLst>
-          </p:cNvPr>
+          <p:cNvPr id="5" name="Footer Placeholder 4"/>
           <p:cNvSpPr>
             <a:spLocks noGrp="1"/>
           </p:cNvSpPr>
@@ -1166,13 +1034,7 @@
       </p:sp>
       <p:sp>
         <p:nvSpPr>
-          <p:cNvPr id="6" name="Slide Number Placeholder 5">
-            <a:extLst>
-              <a:ext uri="{FF2B5EF4-FFF2-40B4-BE49-F238E27FC236}">
-                <a16:creationId xmlns:a16="http://schemas.microsoft.com/office/drawing/2014/main" id="{970C6B8D-47EE-098B-CFF2-16A16FBE2E55}"/>
-              </a:ext>
-            </a:extLst>
-          </p:cNvPr>
+          <p:cNvPr id="6" name="Slide Number Placeholder 5"/>
           <p:cNvSpPr>
             <a:spLocks noGrp="1"/>
           </p:cNvSpPr>
@@ -1196,7 +1058,7 @@
     </p:spTree>
     <p:extLst>
       <p:ext uri="{BB962C8B-B14F-4D97-AF65-F5344CB8AC3E}">
-        <p14:creationId xmlns:p14="http://schemas.microsoft.com/office/powerpoint/2010/main" val="1335913299"/>
+        <p14:creationId xmlns:p14="http://schemas.microsoft.com/office/powerpoint/2010/main" val="2849487774"/>
       </p:ext>
     </p:extLst>
   </p:cSld>
@@ -1225,13 +1087,7 @@
       </p:grpSpPr>
       <p:sp>
         <p:nvSpPr>
-          <p:cNvPr id="2" name="Title 1">
-            <a:extLst>
-              <a:ext uri="{FF2B5EF4-FFF2-40B4-BE49-F238E27FC236}">
-                <a16:creationId xmlns:a16="http://schemas.microsoft.com/office/drawing/2014/main" id="{EFD5843D-0B72-C036-D02A-E380804A2391}"/>
-              </a:ext>
-            </a:extLst>
-          </p:cNvPr>
+          <p:cNvPr id="2" name="Title 1"/>
           <p:cNvSpPr>
             <a:spLocks noGrp="1"/>
           </p:cNvSpPr>
@@ -1248,18 +1104,13 @@
               <a:rPr lang="en-US"/>
               <a:t>Click to edit Master title style</a:t>
             </a:r>
-          </a:p>
-        </p:txBody>
-      </p:sp>
-      <p:sp>
-        <p:nvSpPr>
-          <p:cNvPr id="3" name="Content Placeholder 2">
-            <a:extLst>
-              <a:ext uri="{FF2B5EF4-FFF2-40B4-BE49-F238E27FC236}">
-                <a16:creationId xmlns:a16="http://schemas.microsoft.com/office/drawing/2014/main" id="{85C77403-A2CA-DE56-7994-09B7130DB22D}"/>
-              </a:ext>
-            </a:extLst>
-          </p:cNvPr>
+            <a:endParaRPr lang="en-US" dirty="0"/>
+          </a:p>
+        </p:txBody>
+      </p:sp>
+      <p:sp>
+        <p:nvSpPr>
+          <p:cNvPr id="3" name="Content Placeholder 2"/>
           <p:cNvSpPr>
             <a:spLocks noGrp="1"/>
           </p:cNvSpPr>
@@ -1269,8 +1120,8 @@
         </p:nvSpPr>
         <p:spPr>
           <a:xfrm>
-            <a:off x="838200" y="1825625"/>
-            <a:ext cx="5181600" cy="4351338"/>
+            <a:off x="640874" y="1947333"/>
+            <a:ext cx="3961765" cy="4641427"/>
           </a:xfrm>
         </p:spPr>
         <p:txBody>
@@ -1310,18 +1161,13 @@
               <a:rPr lang="en-US"/>
               <a:t>Fifth level</a:t>
             </a:r>
-          </a:p>
-        </p:txBody>
-      </p:sp>
-      <p:sp>
-        <p:nvSpPr>
-          <p:cNvPr id="4" name="Content Placeholder 3">
-            <a:extLst>
-              <a:ext uri="{FF2B5EF4-FFF2-40B4-BE49-F238E27FC236}">
-                <a16:creationId xmlns:a16="http://schemas.microsoft.com/office/drawing/2014/main" id="{D2DF844A-6359-CF82-5919-FD8759274A36}"/>
-              </a:ext>
-            </a:extLst>
-          </p:cNvPr>
+            <a:endParaRPr lang="en-US" dirty="0"/>
+          </a:p>
+        </p:txBody>
+      </p:sp>
+      <p:sp>
+        <p:nvSpPr>
+          <p:cNvPr id="4" name="Content Placeholder 3"/>
           <p:cNvSpPr>
             <a:spLocks noGrp="1"/>
           </p:cNvSpPr>
@@ -1331,8 +1177,8 @@
         </p:nvSpPr>
         <p:spPr>
           <a:xfrm>
-            <a:off x="6172200" y="1825625"/>
-            <a:ext cx="5181600" cy="4351338"/>
+            <a:off x="4719161" y="1947333"/>
+            <a:ext cx="3961765" cy="4641427"/>
           </a:xfrm>
         </p:spPr>
         <p:txBody>
@@ -1372,18 +1218,13 @@
               <a:rPr lang="en-US"/>
               <a:t>Fifth level</a:t>
             </a:r>
-          </a:p>
-        </p:txBody>
-      </p:sp>
-      <p:sp>
-        <p:nvSpPr>
-          <p:cNvPr id="5" name="Date Placeholder 4">
-            <a:extLst>
-              <a:ext uri="{FF2B5EF4-FFF2-40B4-BE49-F238E27FC236}">
-                <a16:creationId xmlns:a16="http://schemas.microsoft.com/office/drawing/2014/main" id="{B03742FE-8F64-1443-11CA-65749171D452}"/>
-              </a:ext>
-            </a:extLst>
-          </p:cNvPr>
+            <a:endParaRPr lang="en-US" dirty="0"/>
+          </a:p>
+        </p:txBody>
+      </p:sp>
+      <p:sp>
+        <p:nvSpPr>
+          <p:cNvPr id="5" name="Date Placeholder 4"/>
           <p:cNvSpPr>
             <a:spLocks noGrp="1"/>
           </p:cNvSpPr>
@@ -1398,7 +1239,7 @@
           <a:p>
             <a:fld id="{D875D722-DF1E-D743-9707-4C36F8FB2F91}" type="datetimeFigureOut">
               <a:rPr lang="en-US" smtClean="0"/>
-              <a:t>9/22/23</a:t>
+              <a:t>7/17/25</a:t>
             </a:fld>
             <a:endParaRPr lang="en-US"/>
           </a:p>
@@ -1406,13 +1247,7 @@
       </p:sp>
       <p:sp>
         <p:nvSpPr>
-          <p:cNvPr id="6" name="Footer Placeholder 5">
-            <a:extLst>
-              <a:ext uri="{FF2B5EF4-FFF2-40B4-BE49-F238E27FC236}">
-                <a16:creationId xmlns:a16="http://schemas.microsoft.com/office/drawing/2014/main" id="{81169E49-AF1E-7A35-F017-64A3E788A689}"/>
-              </a:ext>
-            </a:extLst>
-          </p:cNvPr>
+          <p:cNvPr id="6" name="Footer Placeholder 5"/>
           <p:cNvSpPr>
             <a:spLocks noGrp="1"/>
           </p:cNvSpPr>
@@ -1431,13 +1266,7 @@
       </p:sp>
       <p:sp>
         <p:nvSpPr>
-          <p:cNvPr id="7" name="Slide Number Placeholder 6">
-            <a:extLst>
-              <a:ext uri="{FF2B5EF4-FFF2-40B4-BE49-F238E27FC236}">
-                <a16:creationId xmlns:a16="http://schemas.microsoft.com/office/drawing/2014/main" id="{A17191FB-61F2-49A0-4B70-234C7F24C92C}"/>
-              </a:ext>
-            </a:extLst>
-          </p:cNvPr>
+          <p:cNvPr id="7" name="Slide Number Placeholder 6"/>
           <p:cNvSpPr>
             <a:spLocks noGrp="1"/>
           </p:cNvSpPr>
@@ -1461,7 +1290,7 @@
     </p:spTree>
     <p:extLst>
       <p:ext uri="{BB962C8B-B14F-4D97-AF65-F5344CB8AC3E}">
-        <p14:creationId xmlns:p14="http://schemas.microsoft.com/office/powerpoint/2010/main" val="2855343766"/>
+        <p14:creationId xmlns:p14="http://schemas.microsoft.com/office/powerpoint/2010/main" val="1497872259"/>
       </p:ext>
     </p:extLst>
   </p:cSld>
@@ -1490,13 +1319,7 @@
       </p:grpSpPr>
       <p:sp>
         <p:nvSpPr>
-          <p:cNvPr id="2" name="Title 1">
-            <a:extLst>
-              <a:ext uri="{FF2B5EF4-FFF2-40B4-BE49-F238E27FC236}">
-                <a16:creationId xmlns:a16="http://schemas.microsoft.com/office/drawing/2014/main" id="{D6F20AD3-CF48-5900-16F9-9B330E5A7E99}"/>
-              </a:ext>
-            </a:extLst>
-          </p:cNvPr>
+          <p:cNvPr id="2" name="Title 1"/>
           <p:cNvSpPr>
             <a:spLocks noGrp="1"/>
           </p:cNvSpPr>
@@ -1506,8 +1329,8 @@
         </p:nvSpPr>
         <p:spPr>
           <a:xfrm>
-            <a:off x="839788" y="365125"/>
-            <a:ext cx="10515600" cy="1325563"/>
+            <a:off x="642088" y="389468"/>
+            <a:ext cx="8040053" cy="1413934"/>
           </a:xfrm>
         </p:spPr>
         <p:txBody>
@@ -1518,18 +1341,13 @@
               <a:rPr lang="en-US"/>
               <a:t>Click to edit Master title style</a:t>
             </a:r>
-          </a:p>
-        </p:txBody>
-      </p:sp>
-      <p:sp>
-        <p:nvSpPr>
-          <p:cNvPr id="3" name="Text Placeholder 2">
-            <a:extLst>
-              <a:ext uri="{FF2B5EF4-FFF2-40B4-BE49-F238E27FC236}">
-                <a16:creationId xmlns:a16="http://schemas.microsoft.com/office/drawing/2014/main" id="{317BB55E-6986-B956-4AD0-47FFED190ADC}"/>
-              </a:ext>
-            </a:extLst>
-          </p:cNvPr>
+            <a:endParaRPr lang="en-US" dirty="0"/>
+          </a:p>
+        </p:txBody>
+      </p:sp>
+      <p:sp>
+        <p:nvSpPr>
+          <p:cNvPr id="3" name="Text Placeholder 2"/>
           <p:cNvSpPr>
             <a:spLocks noGrp="1"/>
           </p:cNvSpPr>
@@ -1539,8 +1357,8 @@
         </p:nvSpPr>
         <p:spPr>
           <a:xfrm>
-            <a:off x="839788" y="1681163"/>
-            <a:ext cx="5157787" cy="823912"/>
+            <a:off x="642089" y="1793241"/>
+            <a:ext cx="3943558" cy="878839"/>
           </a:xfrm>
         </p:spPr>
         <p:txBody>
@@ -1548,39 +1366,39 @@
           <a:lstStyle>
             <a:lvl1pPr marL="0" indent="0">
               <a:buNone/>
-              <a:defRPr sz="2400" b="1"/>
+              <a:defRPr sz="2447" b="1"/>
             </a:lvl1pPr>
-            <a:lvl2pPr marL="457200" indent="0">
-              <a:buNone/>
-              <a:defRPr sz="2000" b="1"/>
+            <a:lvl2pPr marL="466070" indent="0">
+              <a:buNone/>
+              <a:defRPr sz="2039" b="1"/>
             </a:lvl2pPr>
-            <a:lvl3pPr marL="914400" indent="0">
-              <a:buNone/>
-              <a:defRPr sz="1800" b="1"/>
+            <a:lvl3pPr marL="932139" indent="0">
+              <a:buNone/>
+              <a:defRPr sz="1835" b="1"/>
             </a:lvl3pPr>
-            <a:lvl4pPr marL="1371600" indent="0">
-              <a:buNone/>
-              <a:defRPr sz="1600" b="1"/>
+            <a:lvl4pPr marL="1398209" indent="0">
+              <a:buNone/>
+              <a:defRPr sz="1631" b="1"/>
             </a:lvl4pPr>
-            <a:lvl5pPr marL="1828800" indent="0">
-              <a:buNone/>
-              <a:defRPr sz="1600" b="1"/>
+            <a:lvl5pPr marL="1864279" indent="0">
+              <a:buNone/>
+              <a:defRPr sz="1631" b="1"/>
             </a:lvl5pPr>
-            <a:lvl6pPr marL="2286000" indent="0">
-              <a:buNone/>
-              <a:defRPr sz="1600" b="1"/>
+            <a:lvl6pPr marL="2330348" indent="0">
+              <a:buNone/>
+              <a:defRPr sz="1631" b="1"/>
             </a:lvl6pPr>
-            <a:lvl7pPr marL="2743200" indent="0">
-              <a:buNone/>
-              <a:defRPr sz="1600" b="1"/>
+            <a:lvl7pPr marL="2796418" indent="0">
+              <a:buNone/>
+              <a:defRPr sz="1631" b="1"/>
             </a:lvl7pPr>
-            <a:lvl8pPr marL="3200400" indent="0">
-              <a:buNone/>
-              <a:defRPr sz="1600" b="1"/>
+            <a:lvl8pPr marL="3262488" indent="0">
+              <a:buNone/>
+              <a:defRPr sz="1631" b="1"/>
             </a:lvl8pPr>
-            <a:lvl9pPr marL="3657600" indent="0">
-              <a:buNone/>
-              <a:defRPr sz="1600" b="1"/>
+            <a:lvl9pPr marL="3728557" indent="0">
+              <a:buNone/>
+              <a:defRPr sz="1631" b="1"/>
             </a:lvl9pPr>
           </a:lstStyle>
           <a:p>
@@ -1594,13 +1412,7 @@
       </p:sp>
       <p:sp>
         <p:nvSpPr>
-          <p:cNvPr id="4" name="Content Placeholder 3">
-            <a:extLst>
-              <a:ext uri="{FF2B5EF4-FFF2-40B4-BE49-F238E27FC236}">
-                <a16:creationId xmlns:a16="http://schemas.microsoft.com/office/drawing/2014/main" id="{106D2BA6-522B-527B-B0C3-50F48FF5915C}"/>
-              </a:ext>
-            </a:extLst>
-          </p:cNvPr>
+          <p:cNvPr id="4" name="Content Placeholder 3"/>
           <p:cNvSpPr>
             <a:spLocks noGrp="1"/>
           </p:cNvSpPr>
@@ -1610,8 +1422,8 @@
         </p:nvSpPr>
         <p:spPr>
           <a:xfrm>
-            <a:off x="839788" y="2505075"/>
-            <a:ext cx="5157787" cy="3684588"/>
+            <a:off x="642089" y="2672080"/>
+            <a:ext cx="3943558" cy="3930227"/>
           </a:xfrm>
         </p:spPr>
         <p:txBody>
@@ -1651,18 +1463,13 @@
               <a:rPr lang="en-US"/>
               <a:t>Fifth level</a:t>
             </a:r>
-          </a:p>
-        </p:txBody>
-      </p:sp>
-      <p:sp>
-        <p:nvSpPr>
-          <p:cNvPr id="5" name="Text Placeholder 4">
-            <a:extLst>
-              <a:ext uri="{FF2B5EF4-FFF2-40B4-BE49-F238E27FC236}">
-                <a16:creationId xmlns:a16="http://schemas.microsoft.com/office/drawing/2014/main" id="{01710999-F0BE-7114-E1AB-561B9CE70D0C}"/>
-              </a:ext>
-            </a:extLst>
-          </p:cNvPr>
+            <a:endParaRPr lang="en-US" dirty="0"/>
+          </a:p>
+        </p:txBody>
+      </p:sp>
+      <p:sp>
+        <p:nvSpPr>
+          <p:cNvPr id="5" name="Text Placeholder 4"/>
           <p:cNvSpPr>
             <a:spLocks noGrp="1"/>
           </p:cNvSpPr>
@@ -1672,8 +1479,8 @@
         </p:nvSpPr>
         <p:spPr>
           <a:xfrm>
-            <a:off x="6172200" y="1681163"/>
-            <a:ext cx="5183188" cy="823912"/>
+            <a:off x="4719162" y="1793241"/>
+            <a:ext cx="3962979" cy="878839"/>
           </a:xfrm>
         </p:spPr>
         <p:txBody>
@@ -1681,39 +1488,39 @@
           <a:lstStyle>
             <a:lvl1pPr marL="0" indent="0">
               <a:buNone/>
-              <a:defRPr sz="2400" b="1"/>
+              <a:defRPr sz="2447" b="1"/>
             </a:lvl1pPr>
-            <a:lvl2pPr marL="457200" indent="0">
-              <a:buNone/>
-              <a:defRPr sz="2000" b="1"/>
+            <a:lvl2pPr marL="466070" indent="0">
+              <a:buNone/>
+              <a:defRPr sz="2039" b="1"/>
             </a:lvl2pPr>
-            <a:lvl3pPr marL="914400" indent="0">
-              <a:buNone/>
-              <a:defRPr sz="1800" b="1"/>
+            <a:lvl3pPr marL="932139" indent="0">
+              <a:buNone/>
+              <a:defRPr sz="1835" b="1"/>
             </a:lvl3pPr>
-            <a:lvl4pPr marL="1371600" indent="0">
-              <a:buNone/>
-              <a:defRPr sz="1600" b="1"/>
+            <a:lvl4pPr marL="1398209" indent="0">
+              <a:buNone/>
+              <a:defRPr sz="1631" b="1"/>
             </a:lvl4pPr>
-            <a:lvl5pPr marL="1828800" indent="0">
-              <a:buNone/>
-              <a:defRPr sz="1600" b="1"/>
+            <a:lvl5pPr marL="1864279" indent="0">
+              <a:buNone/>
+              <a:defRPr sz="1631" b="1"/>
             </a:lvl5pPr>
-            <a:lvl6pPr marL="2286000" indent="0">
-              <a:buNone/>
-              <a:defRPr sz="1600" b="1"/>
+            <a:lvl6pPr marL="2330348" indent="0">
+              <a:buNone/>
+              <a:defRPr sz="1631" b="1"/>
             </a:lvl6pPr>
-            <a:lvl7pPr marL="2743200" indent="0">
-              <a:buNone/>
-              <a:defRPr sz="1600" b="1"/>
+            <a:lvl7pPr marL="2796418" indent="0">
+              <a:buNone/>
+              <a:defRPr sz="1631" b="1"/>
             </a:lvl7pPr>
-            <a:lvl8pPr marL="3200400" indent="0">
-              <a:buNone/>
-              <a:defRPr sz="1600" b="1"/>
+            <a:lvl8pPr marL="3262488" indent="0">
+              <a:buNone/>
+              <a:defRPr sz="1631" b="1"/>
             </a:lvl8pPr>
-            <a:lvl9pPr marL="3657600" indent="0">
-              <a:buNone/>
-              <a:defRPr sz="1600" b="1"/>
+            <a:lvl9pPr marL="3728557" indent="0">
+              <a:buNone/>
+              <a:defRPr sz="1631" b="1"/>
             </a:lvl9pPr>
           </a:lstStyle>
           <a:p>
@@ -1727,13 +1534,7 @@
       </p:sp>
       <p:sp>
         <p:nvSpPr>
-          <p:cNvPr id="6" name="Content Placeholder 5">
-            <a:extLst>
-              <a:ext uri="{FF2B5EF4-FFF2-40B4-BE49-F238E27FC236}">
-                <a16:creationId xmlns:a16="http://schemas.microsoft.com/office/drawing/2014/main" id="{61941BE0-4BB5-8870-92DF-0C2464FCB145}"/>
-              </a:ext>
-            </a:extLst>
-          </p:cNvPr>
+          <p:cNvPr id="6" name="Content Placeholder 5"/>
           <p:cNvSpPr>
             <a:spLocks noGrp="1"/>
           </p:cNvSpPr>
@@ -1743,8 +1544,8 @@
         </p:nvSpPr>
         <p:spPr>
           <a:xfrm>
-            <a:off x="6172200" y="2505075"/>
-            <a:ext cx="5183188" cy="3684588"/>
+            <a:off x="4719162" y="2672080"/>
+            <a:ext cx="3962979" cy="3930227"/>
           </a:xfrm>
         </p:spPr>
         <p:txBody>
@@ -1784,18 +1585,13 @@
               <a:rPr lang="en-US"/>
               <a:t>Fifth level</a:t>
             </a:r>
-          </a:p>
-        </p:txBody>
-      </p:sp>
-      <p:sp>
-        <p:nvSpPr>
-          <p:cNvPr id="7" name="Date Placeholder 6">
-            <a:extLst>
-              <a:ext uri="{FF2B5EF4-FFF2-40B4-BE49-F238E27FC236}">
-                <a16:creationId xmlns:a16="http://schemas.microsoft.com/office/drawing/2014/main" id="{84B89C00-1F01-60EF-67CE-75D96C3C3EEB}"/>
-              </a:ext>
-            </a:extLst>
-          </p:cNvPr>
+            <a:endParaRPr lang="en-US" dirty="0"/>
+          </a:p>
+        </p:txBody>
+      </p:sp>
+      <p:sp>
+        <p:nvSpPr>
+          <p:cNvPr id="7" name="Date Placeholder 6"/>
           <p:cNvSpPr>
             <a:spLocks noGrp="1"/>
           </p:cNvSpPr>
@@ -1810,7 +1606,7 @@
           <a:p>
             <a:fld id="{D875D722-DF1E-D743-9707-4C36F8FB2F91}" type="datetimeFigureOut">
               <a:rPr lang="en-US" smtClean="0"/>
-              <a:t>9/22/23</a:t>
+              <a:t>7/17/25</a:t>
             </a:fld>
             <a:endParaRPr lang="en-US"/>
           </a:p>
@@ -1818,13 +1614,7 @@
       </p:sp>
       <p:sp>
         <p:nvSpPr>
-          <p:cNvPr id="8" name="Footer Placeholder 7">
-            <a:extLst>
-              <a:ext uri="{FF2B5EF4-FFF2-40B4-BE49-F238E27FC236}">
-                <a16:creationId xmlns:a16="http://schemas.microsoft.com/office/drawing/2014/main" id="{0C1A8283-9F79-FBAF-4F50-715AD5518297}"/>
-              </a:ext>
-            </a:extLst>
-          </p:cNvPr>
+          <p:cNvPr id="8" name="Footer Placeholder 7"/>
           <p:cNvSpPr>
             <a:spLocks noGrp="1"/>
           </p:cNvSpPr>
@@ -1843,13 +1633,7 @@
       </p:sp>
       <p:sp>
         <p:nvSpPr>
-          <p:cNvPr id="9" name="Slide Number Placeholder 8">
-            <a:extLst>
-              <a:ext uri="{FF2B5EF4-FFF2-40B4-BE49-F238E27FC236}">
-                <a16:creationId xmlns:a16="http://schemas.microsoft.com/office/drawing/2014/main" id="{1FA26935-7728-CCC4-4107-C4FE58009E2A}"/>
-              </a:ext>
-            </a:extLst>
-          </p:cNvPr>
+          <p:cNvPr id="9" name="Slide Number Placeholder 8"/>
           <p:cNvSpPr>
             <a:spLocks noGrp="1"/>
           </p:cNvSpPr>
@@ -1873,7 +1657,7 @@
     </p:spTree>
     <p:extLst>
       <p:ext uri="{BB962C8B-B14F-4D97-AF65-F5344CB8AC3E}">
-        <p14:creationId xmlns:p14="http://schemas.microsoft.com/office/powerpoint/2010/main" val="19905326"/>
+        <p14:creationId xmlns:p14="http://schemas.microsoft.com/office/powerpoint/2010/main" val="3298874934"/>
       </p:ext>
     </p:extLst>
   </p:cSld>
@@ -1902,13 +1686,7 @@
       </p:grpSpPr>
       <p:sp>
         <p:nvSpPr>
-          <p:cNvPr id="2" name="Title 1">
-            <a:extLst>
-              <a:ext uri="{FF2B5EF4-FFF2-40B4-BE49-F238E27FC236}">
-                <a16:creationId xmlns:a16="http://schemas.microsoft.com/office/drawing/2014/main" id="{4A4714A4-344E-AB06-ED46-457AEC0656DC}"/>
-              </a:ext>
-            </a:extLst>
-          </p:cNvPr>
+          <p:cNvPr id="2" name="Title 1"/>
           <p:cNvSpPr>
             <a:spLocks noGrp="1"/>
           </p:cNvSpPr>
@@ -1925,18 +1703,13 @@
               <a:rPr lang="en-US"/>
               <a:t>Click to edit Master title style</a:t>
             </a:r>
-          </a:p>
-        </p:txBody>
-      </p:sp>
-      <p:sp>
-        <p:nvSpPr>
-          <p:cNvPr id="3" name="Date Placeholder 2">
-            <a:extLst>
-              <a:ext uri="{FF2B5EF4-FFF2-40B4-BE49-F238E27FC236}">
-                <a16:creationId xmlns:a16="http://schemas.microsoft.com/office/drawing/2014/main" id="{FD00A85D-CF3C-AEDD-DFE5-F3DF2C80CE14}"/>
-              </a:ext>
-            </a:extLst>
-          </p:cNvPr>
+            <a:endParaRPr lang="en-US" dirty="0"/>
+          </a:p>
+        </p:txBody>
+      </p:sp>
+      <p:sp>
+        <p:nvSpPr>
+          <p:cNvPr id="3" name="Date Placeholder 2"/>
           <p:cNvSpPr>
             <a:spLocks noGrp="1"/>
           </p:cNvSpPr>
@@ -1951,7 +1724,7 @@
           <a:p>
             <a:fld id="{D875D722-DF1E-D743-9707-4C36F8FB2F91}" type="datetimeFigureOut">
               <a:rPr lang="en-US" smtClean="0"/>
-              <a:t>9/22/23</a:t>
+              <a:t>7/17/25</a:t>
             </a:fld>
             <a:endParaRPr lang="en-US"/>
           </a:p>
@@ -1959,13 +1732,7 @@
       </p:sp>
       <p:sp>
         <p:nvSpPr>
-          <p:cNvPr id="4" name="Footer Placeholder 3">
-            <a:extLst>
-              <a:ext uri="{FF2B5EF4-FFF2-40B4-BE49-F238E27FC236}">
-                <a16:creationId xmlns:a16="http://schemas.microsoft.com/office/drawing/2014/main" id="{6806DBD7-7F0C-5F25-076E-82EEA77D8926}"/>
-              </a:ext>
-            </a:extLst>
-          </p:cNvPr>
+          <p:cNvPr id="4" name="Footer Placeholder 3"/>
           <p:cNvSpPr>
             <a:spLocks noGrp="1"/>
           </p:cNvSpPr>
@@ -1984,13 +1751,7 @@
       </p:sp>
       <p:sp>
         <p:nvSpPr>
-          <p:cNvPr id="5" name="Slide Number Placeholder 4">
-            <a:extLst>
-              <a:ext uri="{FF2B5EF4-FFF2-40B4-BE49-F238E27FC236}">
-                <a16:creationId xmlns:a16="http://schemas.microsoft.com/office/drawing/2014/main" id="{A6D1EEB2-E78B-361D-622C-B9091B31206E}"/>
-              </a:ext>
-            </a:extLst>
-          </p:cNvPr>
+          <p:cNvPr id="5" name="Slide Number Placeholder 4"/>
           <p:cNvSpPr>
             <a:spLocks noGrp="1"/>
           </p:cNvSpPr>
@@ -2014,7 +1775,7 @@
     </p:spTree>
     <p:extLst>
       <p:ext uri="{BB962C8B-B14F-4D97-AF65-F5344CB8AC3E}">
-        <p14:creationId xmlns:p14="http://schemas.microsoft.com/office/powerpoint/2010/main" val="445946023"/>
+        <p14:creationId xmlns:p14="http://schemas.microsoft.com/office/powerpoint/2010/main" val="3749390874"/>
       </p:ext>
     </p:extLst>
   </p:cSld>
@@ -2043,13 +1804,7 @@
       </p:grpSpPr>
       <p:sp>
         <p:nvSpPr>
-          <p:cNvPr id="2" name="Date Placeholder 1">
-            <a:extLst>
-              <a:ext uri="{FF2B5EF4-FFF2-40B4-BE49-F238E27FC236}">
-                <a16:creationId xmlns:a16="http://schemas.microsoft.com/office/drawing/2014/main" id="{1039E6AF-F161-CBFB-1D23-7A38A252EFB5}"/>
-              </a:ext>
-            </a:extLst>
-          </p:cNvPr>
+          <p:cNvPr id="2" name="Date Placeholder 1"/>
           <p:cNvSpPr>
             <a:spLocks noGrp="1"/>
           </p:cNvSpPr>
@@ -2064,7 +1819,7 @@
           <a:p>
             <a:fld id="{D875D722-DF1E-D743-9707-4C36F8FB2F91}" type="datetimeFigureOut">
               <a:rPr lang="en-US" smtClean="0"/>
-              <a:t>9/22/23</a:t>
+              <a:t>7/17/25</a:t>
             </a:fld>
             <a:endParaRPr lang="en-US"/>
           </a:p>
@@ -2072,13 +1827,7 @@
       </p:sp>
       <p:sp>
         <p:nvSpPr>
-          <p:cNvPr id="3" name="Footer Placeholder 2">
-            <a:extLst>
-              <a:ext uri="{FF2B5EF4-FFF2-40B4-BE49-F238E27FC236}">
-                <a16:creationId xmlns:a16="http://schemas.microsoft.com/office/drawing/2014/main" id="{C1DAF436-BB0D-E49D-9282-879D351872FD}"/>
-              </a:ext>
-            </a:extLst>
-          </p:cNvPr>
+          <p:cNvPr id="3" name="Footer Placeholder 2"/>
           <p:cNvSpPr>
             <a:spLocks noGrp="1"/>
           </p:cNvSpPr>
@@ -2097,13 +1846,7 @@
       </p:sp>
       <p:sp>
         <p:nvSpPr>
-          <p:cNvPr id="4" name="Slide Number Placeholder 3">
-            <a:extLst>
-              <a:ext uri="{FF2B5EF4-FFF2-40B4-BE49-F238E27FC236}">
-                <a16:creationId xmlns:a16="http://schemas.microsoft.com/office/drawing/2014/main" id="{39C95BF1-40C6-21CB-6448-B5EAA5564D0D}"/>
-              </a:ext>
-            </a:extLst>
-          </p:cNvPr>
+          <p:cNvPr id="4" name="Slide Number Placeholder 3"/>
           <p:cNvSpPr>
             <a:spLocks noGrp="1"/>
           </p:cNvSpPr>
@@ -2127,7 +1870,7 @@
     </p:spTree>
     <p:extLst>
       <p:ext uri="{BB962C8B-B14F-4D97-AF65-F5344CB8AC3E}">
-        <p14:creationId xmlns:p14="http://schemas.microsoft.com/office/powerpoint/2010/main" val="3728496201"/>
+        <p14:creationId xmlns:p14="http://schemas.microsoft.com/office/powerpoint/2010/main" val="1355794926"/>
       </p:ext>
     </p:extLst>
   </p:cSld>
@@ -2156,13 +1899,7 @@
       </p:grpSpPr>
       <p:sp>
         <p:nvSpPr>
-          <p:cNvPr id="2" name="Title 1">
-            <a:extLst>
-              <a:ext uri="{FF2B5EF4-FFF2-40B4-BE49-F238E27FC236}">
-                <a16:creationId xmlns:a16="http://schemas.microsoft.com/office/drawing/2014/main" id="{FBD976CA-1C84-16F1-FF5B-1AA3E2AC7B41}"/>
-              </a:ext>
-            </a:extLst>
-          </p:cNvPr>
+          <p:cNvPr id="2" name="Title 1"/>
           <p:cNvSpPr>
             <a:spLocks noGrp="1"/>
           </p:cNvSpPr>
@@ -2172,15 +1909,15 @@
         </p:nvSpPr>
         <p:spPr>
           <a:xfrm>
-            <a:off x="839788" y="457200"/>
-            <a:ext cx="3932237" cy="1600200"/>
+            <a:off x="642088" y="487680"/>
+            <a:ext cx="3006523" cy="1706880"/>
           </a:xfrm>
         </p:spPr>
         <p:txBody>
           <a:bodyPr anchor="b"/>
           <a:lstStyle>
             <a:lvl1pPr>
-              <a:defRPr sz="3200"/>
+              <a:defRPr sz="3262"/>
             </a:lvl1pPr>
           </a:lstStyle>
           <a:p>
@@ -2188,18 +1925,13 @@
               <a:rPr lang="en-US"/>
               <a:t>Click to edit Master title style</a:t>
             </a:r>
-          </a:p>
-        </p:txBody>
-      </p:sp>
-      <p:sp>
-        <p:nvSpPr>
-          <p:cNvPr id="3" name="Content Placeholder 2">
-            <a:extLst>
-              <a:ext uri="{FF2B5EF4-FFF2-40B4-BE49-F238E27FC236}">
-                <a16:creationId xmlns:a16="http://schemas.microsoft.com/office/drawing/2014/main" id="{39B432BF-A322-A092-700C-8E19A193966C}"/>
-              </a:ext>
-            </a:extLst>
-          </p:cNvPr>
+            <a:endParaRPr lang="en-US" dirty="0"/>
+          </a:p>
+        </p:txBody>
+      </p:sp>
+      <p:sp>
+        <p:nvSpPr>
+          <p:cNvPr id="3" name="Content Placeholder 2"/>
           <p:cNvSpPr>
             <a:spLocks noGrp="1"/>
           </p:cNvSpPr>
@@ -2209,39 +1941,39 @@
         </p:nvSpPr>
         <p:spPr>
           <a:xfrm>
-            <a:off x="5183188" y="987425"/>
-            <a:ext cx="6172200" cy="4873625"/>
+            <a:off x="3962979" y="1053255"/>
+            <a:ext cx="4719161" cy="5198533"/>
           </a:xfrm>
         </p:spPr>
         <p:txBody>
           <a:bodyPr/>
           <a:lstStyle>
             <a:lvl1pPr>
-              <a:defRPr sz="3200"/>
+              <a:defRPr sz="3262"/>
             </a:lvl1pPr>
             <a:lvl2pPr>
-              <a:defRPr sz="2800"/>
+              <a:defRPr sz="2854"/>
             </a:lvl2pPr>
             <a:lvl3pPr>
-              <a:defRPr sz="2400"/>
+              <a:defRPr sz="2447"/>
             </a:lvl3pPr>
             <a:lvl4pPr>
-              <a:defRPr sz="2000"/>
+              <a:defRPr sz="2039"/>
             </a:lvl4pPr>
             <a:lvl5pPr>
-              <a:defRPr sz="2000"/>
+              <a:defRPr sz="2039"/>
             </a:lvl5pPr>
             <a:lvl6pPr>
-              <a:defRPr sz="2000"/>
+              <a:defRPr sz="2039"/>
             </a:lvl6pPr>
             <a:lvl7pPr>
-              <a:defRPr sz="2000"/>
+              <a:defRPr sz="2039"/>
             </a:lvl7pPr>
             <a:lvl8pPr>
-              <a:defRPr sz="2000"/>
+              <a:defRPr sz="2039"/>
             </a:lvl8pPr>
             <a:lvl9pPr>
-              <a:defRPr sz="2000"/>
+              <a:defRPr sz="2039"/>
             </a:lvl9pPr>
           </a:lstStyle>
           <a:p>
@@ -2278,18 +2010,13 @@
               <a:rPr lang="en-US"/>
               <a:t>Fifth level</a:t>
             </a:r>
-          </a:p>
-        </p:txBody>
-      </p:sp>
-      <p:sp>
-        <p:nvSpPr>
-          <p:cNvPr id="4" name="Text Placeholder 3">
-            <a:extLst>
-              <a:ext uri="{FF2B5EF4-FFF2-40B4-BE49-F238E27FC236}">
-                <a16:creationId xmlns:a16="http://schemas.microsoft.com/office/drawing/2014/main" id="{8EF3B7B7-2232-D5EE-22B9-03C0E3416110}"/>
-              </a:ext>
-            </a:extLst>
-          </p:cNvPr>
+            <a:endParaRPr lang="en-US" dirty="0"/>
+          </a:p>
+        </p:txBody>
+      </p:sp>
+      <p:sp>
+        <p:nvSpPr>
+          <p:cNvPr id="4" name="Text Placeholder 3"/>
           <p:cNvSpPr>
             <a:spLocks noGrp="1"/>
           </p:cNvSpPr>
@@ -2299,8 +2026,8 @@
         </p:nvSpPr>
         <p:spPr>
           <a:xfrm>
-            <a:off x="839788" y="2057400"/>
-            <a:ext cx="3932237" cy="3811588"/>
+            <a:off x="642088" y="2194560"/>
+            <a:ext cx="3006523" cy="4065694"/>
           </a:xfrm>
         </p:spPr>
         <p:txBody>
@@ -2308,39 +2035,39 @@
           <a:lstStyle>
             <a:lvl1pPr marL="0" indent="0">
               <a:buNone/>
-              <a:defRPr sz="1600"/>
+              <a:defRPr sz="1631"/>
             </a:lvl1pPr>
-            <a:lvl2pPr marL="457200" indent="0">
-              <a:buNone/>
-              <a:defRPr sz="1400"/>
+            <a:lvl2pPr marL="466070" indent="0">
+              <a:buNone/>
+              <a:defRPr sz="1427"/>
             </a:lvl2pPr>
-            <a:lvl3pPr marL="914400" indent="0">
-              <a:buNone/>
-              <a:defRPr sz="1200"/>
+            <a:lvl3pPr marL="932139" indent="0">
+              <a:buNone/>
+              <a:defRPr sz="1223"/>
             </a:lvl3pPr>
-            <a:lvl4pPr marL="1371600" indent="0">
-              <a:buNone/>
-              <a:defRPr sz="1000"/>
+            <a:lvl4pPr marL="1398209" indent="0">
+              <a:buNone/>
+              <a:defRPr sz="1019"/>
             </a:lvl4pPr>
-            <a:lvl5pPr marL="1828800" indent="0">
-              <a:buNone/>
-              <a:defRPr sz="1000"/>
+            <a:lvl5pPr marL="1864279" indent="0">
+              <a:buNone/>
+              <a:defRPr sz="1019"/>
             </a:lvl5pPr>
-            <a:lvl6pPr marL="2286000" indent="0">
-              <a:buNone/>
-              <a:defRPr sz="1000"/>
+            <a:lvl6pPr marL="2330348" indent="0">
+              <a:buNone/>
+              <a:defRPr sz="1019"/>
             </a:lvl6pPr>
-            <a:lvl7pPr marL="2743200" indent="0">
-              <a:buNone/>
-              <a:defRPr sz="1000"/>
+            <a:lvl7pPr marL="2796418" indent="0">
+              <a:buNone/>
+              <a:defRPr sz="1019"/>
             </a:lvl7pPr>
-            <a:lvl8pPr marL="3200400" indent="0">
-              <a:buNone/>
-              <a:defRPr sz="1000"/>
+            <a:lvl8pPr marL="3262488" indent="0">
+              <a:buNone/>
+              <a:defRPr sz="1019"/>
             </a:lvl8pPr>
-            <a:lvl9pPr marL="3657600" indent="0">
-              <a:buNone/>
-              <a:defRPr sz="1000"/>
+            <a:lvl9pPr marL="3728557" indent="0">
+              <a:buNone/>
+              <a:defRPr sz="1019"/>
             </a:lvl9pPr>
           </a:lstStyle>
           <a:p>
@@ -2354,13 +2081,7 @@
       </p:sp>
       <p:sp>
         <p:nvSpPr>
-          <p:cNvPr id="5" name="Date Placeholder 4">
-            <a:extLst>
-              <a:ext uri="{FF2B5EF4-FFF2-40B4-BE49-F238E27FC236}">
-                <a16:creationId xmlns:a16="http://schemas.microsoft.com/office/drawing/2014/main" id="{F4FEDC42-CCBB-A68C-B3C0-4C18FEE53B99}"/>
-              </a:ext>
-            </a:extLst>
-          </p:cNvPr>
+          <p:cNvPr id="5" name="Date Placeholder 4"/>
           <p:cNvSpPr>
             <a:spLocks noGrp="1"/>
           </p:cNvSpPr>
@@ -2375,7 +2096,7 @@
           <a:p>
             <a:fld id="{D875D722-DF1E-D743-9707-4C36F8FB2F91}" type="datetimeFigureOut">
               <a:rPr lang="en-US" smtClean="0"/>
-              <a:t>9/22/23</a:t>
+              <a:t>7/17/25</a:t>
             </a:fld>
             <a:endParaRPr lang="en-US"/>
           </a:p>
@@ -2383,13 +2104,7 @@
       </p:sp>
       <p:sp>
         <p:nvSpPr>
-          <p:cNvPr id="6" name="Footer Placeholder 5">
-            <a:extLst>
-              <a:ext uri="{FF2B5EF4-FFF2-40B4-BE49-F238E27FC236}">
-                <a16:creationId xmlns:a16="http://schemas.microsoft.com/office/drawing/2014/main" id="{8AF8A0CB-474C-73D9-D707-9876A9828CFA}"/>
-              </a:ext>
-            </a:extLst>
-          </p:cNvPr>
+          <p:cNvPr id="6" name="Footer Placeholder 5"/>
           <p:cNvSpPr>
             <a:spLocks noGrp="1"/>
           </p:cNvSpPr>
@@ -2408,13 +2123,7 @@
       </p:sp>
       <p:sp>
         <p:nvSpPr>
-          <p:cNvPr id="7" name="Slide Number Placeholder 6">
-            <a:extLst>
-              <a:ext uri="{FF2B5EF4-FFF2-40B4-BE49-F238E27FC236}">
-                <a16:creationId xmlns:a16="http://schemas.microsoft.com/office/drawing/2014/main" id="{0996CEBE-95C4-B16C-3170-7785DFE1EDE4}"/>
-              </a:ext>
-            </a:extLst>
-          </p:cNvPr>
+          <p:cNvPr id="7" name="Slide Number Placeholder 6"/>
           <p:cNvSpPr>
             <a:spLocks noGrp="1"/>
           </p:cNvSpPr>
@@ -2438,7 +2147,7 @@
     </p:spTree>
     <p:extLst>
       <p:ext uri="{BB962C8B-B14F-4D97-AF65-F5344CB8AC3E}">
-        <p14:creationId xmlns:p14="http://schemas.microsoft.com/office/powerpoint/2010/main" val="2518952864"/>
+        <p14:creationId xmlns:p14="http://schemas.microsoft.com/office/powerpoint/2010/main" val="2637930715"/>
       </p:ext>
     </p:extLst>
   </p:cSld>
@@ -2467,13 +2176,7 @@
       </p:grpSpPr>
       <p:sp>
         <p:nvSpPr>
-          <p:cNvPr id="2" name="Title 1">
-            <a:extLst>
-              <a:ext uri="{FF2B5EF4-FFF2-40B4-BE49-F238E27FC236}">
-                <a16:creationId xmlns:a16="http://schemas.microsoft.com/office/drawing/2014/main" id="{C08FC85C-917C-9063-B117-7AD762CFC2C3}"/>
-              </a:ext>
-            </a:extLst>
-          </p:cNvPr>
+          <p:cNvPr id="2" name="Title 1"/>
           <p:cNvSpPr>
             <a:spLocks noGrp="1"/>
           </p:cNvSpPr>
@@ -2483,15 +2186,15 @@
         </p:nvSpPr>
         <p:spPr>
           <a:xfrm>
-            <a:off x="839788" y="457200"/>
-            <a:ext cx="3932237" cy="1600200"/>
+            <a:off x="642088" y="487680"/>
+            <a:ext cx="3006523" cy="1706880"/>
           </a:xfrm>
         </p:spPr>
         <p:txBody>
           <a:bodyPr anchor="b"/>
           <a:lstStyle>
             <a:lvl1pPr>
-              <a:defRPr sz="3200"/>
+              <a:defRPr sz="3262"/>
             </a:lvl1pPr>
           </a:lstStyle>
           <a:p>
@@ -2499,20 +2202,15 @@
               <a:rPr lang="en-US"/>
               <a:t>Click to edit Master title style</a:t>
             </a:r>
-          </a:p>
-        </p:txBody>
-      </p:sp>
-      <p:sp>
-        <p:nvSpPr>
-          <p:cNvPr id="3" name="Picture Placeholder 2">
-            <a:extLst>
-              <a:ext uri="{FF2B5EF4-FFF2-40B4-BE49-F238E27FC236}">
-                <a16:creationId xmlns:a16="http://schemas.microsoft.com/office/drawing/2014/main" id="{2EC9C56B-333B-7E3A-DCB0-4DB98E21E58B}"/>
-              </a:ext>
-            </a:extLst>
-          </p:cNvPr>
-          <p:cNvSpPr>
-            <a:spLocks noGrp="1"/>
+            <a:endParaRPr lang="en-US" dirty="0"/>
+          </a:p>
+        </p:txBody>
+      </p:sp>
+      <p:sp>
+        <p:nvSpPr>
+          <p:cNvPr id="3" name="Picture Placeholder 2"/>
+          <p:cNvSpPr>
+            <a:spLocks noGrp="1" noChangeAspect="1"/>
           </p:cNvSpPr>
           <p:nvPr>
             <p:ph type="pic" idx="1"/>
@@ -2520,64 +2218,62 @@
         </p:nvSpPr>
         <p:spPr>
           <a:xfrm>
-            <a:off x="5183188" y="987425"/>
-            <a:ext cx="6172200" cy="4873625"/>
+            <a:off x="3962979" y="1053255"/>
+            <a:ext cx="4719161" cy="5198533"/>
           </a:xfrm>
         </p:spPr>
         <p:txBody>
-          <a:bodyPr/>
+          <a:bodyPr anchor="t"/>
           <a:lstStyle>
             <a:lvl1pPr marL="0" indent="0">
               <a:buNone/>
-              <a:defRPr sz="3200"/>
+              <a:defRPr sz="3262"/>
             </a:lvl1pPr>
-            <a:lvl2pPr marL="457200" indent="0">
-              <a:buNone/>
-              <a:defRPr sz="2800"/>
+            <a:lvl2pPr marL="466070" indent="0">
+              <a:buNone/>
+              <a:defRPr sz="2854"/>
             </a:lvl2pPr>
-            <a:lvl3pPr marL="914400" indent="0">
-              <a:buNone/>
-              <a:defRPr sz="2400"/>
+            <a:lvl3pPr marL="932139" indent="0">
+              <a:buNone/>
+              <a:defRPr sz="2447"/>
             </a:lvl3pPr>
-            <a:lvl4pPr marL="1371600" indent="0">
-              <a:buNone/>
-              <a:defRPr sz="2000"/>
+            <a:lvl4pPr marL="1398209" indent="0">
+              <a:buNone/>
+              <a:defRPr sz="2039"/>
             </a:lvl4pPr>
-            <a:lvl5pPr marL="1828800" indent="0">
-              <a:buNone/>
-              <a:defRPr sz="2000"/>
+            <a:lvl5pPr marL="1864279" indent="0">
+              <a:buNone/>
+              <a:defRPr sz="2039"/>
             </a:lvl5pPr>
-            <a:lvl6pPr marL="2286000" indent="0">
-              <a:buNone/>
-              <a:defRPr sz="2000"/>
+            <a:lvl6pPr marL="2330348" indent="0">
+              <a:buNone/>
+              <a:defRPr sz="2039"/>
             </a:lvl6pPr>
-            <a:lvl7pPr marL="2743200" indent="0">
-              <a:buNone/>
-              <a:defRPr sz="2000"/>
+            <a:lvl7pPr marL="2796418" indent="0">
+              <a:buNone/>
+              <a:defRPr sz="2039"/>
             </a:lvl7pPr>
-            <a:lvl8pPr marL="3200400" indent="0">
-              <a:buNone/>
-              <a:defRPr sz="2000"/>
+            <a:lvl8pPr marL="3262488" indent="0">
+              <a:buNone/>
+              <a:defRPr sz="2039"/>
             </a:lvl8pPr>
-            <a:lvl9pPr marL="3657600" indent="0">
-              <a:buNone/>
-              <a:defRPr sz="2000"/>
+            <a:lvl9pPr marL="3728557" indent="0">
+              <a:buNone/>
+              <a:defRPr sz="2039"/>
             </a:lvl9pPr>
           </a:lstStyle>
           <a:p>
-            <a:endParaRPr lang="en-US"/>
-          </a:p>
-        </p:txBody>
-      </p:sp>
-      <p:sp>
-        <p:nvSpPr>
-          <p:cNvPr id="4" name="Text Placeholder 3">
-            <a:extLst>
-              <a:ext uri="{FF2B5EF4-FFF2-40B4-BE49-F238E27FC236}">
-                <a16:creationId xmlns:a16="http://schemas.microsoft.com/office/drawing/2014/main" id="{D07DF452-402E-92EF-A876-3CAEA530E0E2}"/>
-              </a:ext>
-            </a:extLst>
-          </p:cNvPr>
+            <a:r>
+              <a:rPr lang="en-US"/>
+              <a:t>Click icon to add picture</a:t>
+            </a:r>
+            <a:endParaRPr lang="en-US" dirty="0"/>
+          </a:p>
+        </p:txBody>
+      </p:sp>
+      <p:sp>
+        <p:nvSpPr>
+          <p:cNvPr id="4" name="Text Placeholder 3"/>
           <p:cNvSpPr>
             <a:spLocks noGrp="1"/>
           </p:cNvSpPr>
@@ -2587,8 +2283,8 @@
         </p:nvSpPr>
         <p:spPr>
           <a:xfrm>
-            <a:off x="839788" y="2057400"/>
-            <a:ext cx="3932237" cy="3811588"/>
+            <a:off x="642088" y="2194560"/>
+            <a:ext cx="3006523" cy="4065694"/>
           </a:xfrm>
         </p:spPr>
         <p:txBody>
@@ -2596,39 +2292,39 @@
           <a:lstStyle>
             <a:lvl1pPr marL="0" indent="0">
               <a:buNone/>
-              <a:defRPr sz="1600"/>
+              <a:defRPr sz="1631"/>
             </a:lvl1pPr>
-            <a:lvl2pPr marL="457200" indent="0">
-              <a:buNone/>
-              <a:defRPr sz="1400"/>
+            <a:lvl2pPr marL="466070" indent="0">
+              <a:buNone/>
+              <a:defRPr sz="1427"/>
             </a:lvl2pPr>
-            <a:lvl3pPr marL="914400" indent="0">
-              <a:buNone/>
-              <a:defRPr sz="1200"/>
+            <a:lvl3pPr marL="932139" indent="0">
+              <a:buNone/>
+              <a:defRPr sz="1223"/>
             </a:lvl3pPr>
-            <a:lvl4pPr marL="1371600" indent="0">
-              <a:buNone/>
-              <a:defRPr sz="1000"/>
+            <a:lvl4pPr marL="1398209" indent="0">
+              <a:buNone/>
+              <a:defRPr sz="1019"/>
             </a:lvl4pPr>
-            <a:lvl5pPr marL="1828800" indent="0">
-              <a:buNone/>
-              <a:defRPr sz="1000"/>
+            <a:lvl5pPr marL="1864279" indent="0">
+              <a:buNone/>
+              <a:defRPr sz="1019"/>
             </a:lvl5pPr>
-            <a:lvl6pPr marL="2286000" indent="0">
-              <a:buNone/>
-              <a:defRPr sz="1000"/>
+            <a:lvl6pPr marL="2330348" indent="0">
+              <a:buNone/>
+              <a:defRPr sz="1019"/>
             </a:lvl6pPr>
-            <a:lvl7pPr marL="2743200" indent="0">
-              <a:buNone/>
-              <a:defRPr sz="1000"/>
+            <a:lvl7pPr marL="2796418" indent="0">
+              <a:buNone/>
+              <a:defRPr sz="1019"/>
             </a:lvl7pPr>
-            <a:lvl8pPr marL="3200400" indent="0">
-              <a:buNone/>
-              <a:defRPr sz="1000"/>
+            <a:lvl8pPr marL="3262488" indent="0">
+              <a:buNone/>
+              <a:defRPr sz="1019"/>
             </a:lvl8pPr>
-            <a:lvl9pPr marL="3657600" indent="0">
-              <a:buNone/>
-              <a:defRPr sz="1000"/>
+            <a:lvl9pPr marL="3728557" indent="0">
+              <a:buNone/>
+              <a:defRPr sz="1019"/>
             </a:lvl9pPr>
           </a:lstStyle>
           <a:p>
@@ -2642,13 +2338,7 @@
       </p:sp>
       <p:sp>
         <p:nvSpPr>
-          <p:cNvPr id="5" name="Date Placeholder 4">
-            <a:extLst>
-              <a:ext uri="{FF2B5EF4-FFF2-40B4-BE49-F238E27FC236}">
-                <a16:creationId xmlns:a16="http://schemas.microsoft.com/office/drawing/2014/main" id="{74C4634C-A882-D426-AB83-CA712735044C}"/>
-              </a:ext>
-            </a:extLst>
-          </p:cNvPr>
+          <p:cNvPr id="5" name="Date Placeholder 4"/>
           <p:cNvSpPr>
             <a:spLocks noGrp="1"/>
           </p:cNvSpPr>
@@ -2663,7 +2353,7 @@
           <a:p>
             <a:fld id="{D875D722-DF1E-D743-9707-4C36F8FB2F91}" type="datetimeFigureOut">
               <a:rPr lang="en-US" smtClean="0"/>
-              <a:t>9/22/23</a:t>
+              <a:t>7/17/25</a:t>
             </a:fld>
             <a:endParaRPr lang="en-US"/>
           </a:p>
@@ -2671,13 +2361,7 @@
       </p:sp>
       <p:sp>
         <p:nvSpPr>
-          <p:cNvPr id="6" name="Footer Placeholder 5">
-            <a:extLst>
-              <a:ext uri="{FF2B5EF4-FFF2-40B4-BE49-F238E27FC236}">
-                <a16:creationId xmlns:a16="http://schemas.microsoft.com/office/drawing/2014/main" id="{BB6362E8-3268-6FAA-287B-FE56C9F6AAC5}"/>
-              </a:ext>
-            </a:extLst>
-          </p:cNvPr>
+          <p:cNvPr id="6" name="Footer Placeholder 5"/>
           <p:cNvSpPr>
             <a:spLocks noGrp="1"/>
           </p:cNvSpPr>
@@ -2696,13 +2380,7 @@
       </p:sp>
       <p:sp>
         <p:nvSpPr>
-          <p:cNvPr id="7" name="Slide Number Placeholder 6">
-            <a:extLst>
-              <a:ext uri="{FF2B5EF4-FFF2-40B4-BE49-F238E27FC236}">
-                <a16:creationId xmlns:a16="http://schemas.microsoft.com/office/drawing/2014/main" id="{81AEE74F-92B6-1C2C-EC6C-6F844821A242}"/>
-              </a:ext>
-            </a:extLst>
-          </p:cNvPr>
+          <p:cNvPr id="7" name="Slide Number Placeholder 6"/>
           <p:cNvSpPr>
             <a:spLocks noGrp="1"/>
           </p:cNvSpPr>
@@ -2726,7 +2404,7 @@
     </p:spTree>
     <p:extLst>
       <p:ext uri="{BB962C8B-B14F-4D97-AF65-F5344CB8AC3E}">
-        <p14:creationId xmlns:p14="http://schemas.microsoft.com/office/powerpoint/2010/main" val="2325147851"/>
+        <p14:creationId xmlns:p14="http://schemas.microsoft.com/office/powerpoint/2010/main" val="1547577217"/>
       </p:ext>
     </p:extLst>
   </p:cSld>
@@ -2760,13 +2438,7 @@
       </p:grpSpPr>
       <p:sp>
         <p:nvSpPr>
-          <p:cNvPr id="2" name="Title Placeholder 1">
-            <a:extLst>
-              <a:ext uri="{FF2B5EF4-FFF2-40B4-BE49-F238E27FC236}">
-                <a16:creationId xmlns:a16="http://schemas.microsoft.com/office/drawing/2014/main" id="{07A42392-7CD3-2784-F8C0-A0826A53B457}"/>
-              </a:ext>
-            </a:extLst>
-          </p:cNvPr>
+          <p:cNvPr id="2" name="Title Placeholder 1"/>
           <p:cNvSpPr>
             <a:spLocks noGrp="1"/>
           </p:cNvSpPr>
@@ -2776,8 +2448,8 @@
         </p:nvSpPr>
         <p:spPr>
           <a:xfrm>
-            <a:off x="838200" y="365125"/>
-            <a:ext cx="10515600" cy="1325563"/>
+            <a:off x="640874" y="389468"/>
+            <a:ext cx="8040053" cy="1413934"/>
           </a:xfrm>
           <a:prstGeom prst="rect">
             <a:avLst/>
@@ -2793,18 +2465,13 @@
               <a:rPr lang="en-US"/>
               <a:t>Click to edit Master title style</a:t>
             </a:r>
-          </a:p>
-        </p:txBody>
-      </p:sp>
-      <p:sp>
-        <p:nvSpPr>
-          <p:cNvPr id="3" name="Text Placeholder 2">
-            <a:extLst>
-              <a:ext uri="{FF2B5EF4-FFF2-40B4-BE49-F238E27FC236}">
-                <a16:creationId xmlns:a16="http://schemas.microsoft.com/office/drawing/2014/main" id="{DC06E36A-674C-DE53-10D8-52E193F4F74F}"/>
-              </a:ext>
-            </a:extLst>
-          </p:cNvPr>
+            <a:endParaRPr lang="en-US" dirty="0"/>
+          </a:p>
+        </p:txBody>
+      </p:sp>
+      <p:sp>
+        <p:nvSpPr>
+          <p:cNvPr id="3" name="Text Placeholder 2"/>
           <p:cNvSpPr>
             <a:spLocks noGrp="1"/>
           </p:cNvSpPr>
@@ -2814,8 +2481,8 @@
         </p:nvSpPr>
         <p:spPr>
           <a:xfrm>
-            <a:off x="838200" y="1825625"/>
-            <a:ext cx="10515600" cy="4351338"/>
+            <a:off x="640874" y="1947333"/>
+            <a:ext cx="8040053" cy="4641427"/>
           </a:xfrm>
           <a:prstGeom prst="rect">
             <a:avLst/>
@@ -2860,18 +2527,13 @@
               <a:rPr lang="en-US"/>
               <a:t>Fifth level</a:t>
             </a:r>
-          </a:p>
-        </p:txBody>
-      </p:sp>
-      <p:sp>
-        <p:nvSpPr>
-          <p:cNvPr id="4" name="Date Placeholder 3">
-            <a:extLst>
-              <a:ext uri="{FF2B5EF4-FFF2-40B4-BE49-F238E27FC236}">
-                <a16:creationId xmlns:a16="http://schemas.microsoft.com/office/drawing/2014/main" id="{F1638FD4-FBD0-4B0F-285B-A16BFE0EA5D2}"/>
-              </a:ext>
-            </a:extLst>
-          </p:cNvPr>
+            <a:endParaRPr lang="en-US" dirty="0"/>
+          </a:p>
+        </p:txBody>
+      </p:sp>
+      <p:sp>
+        <p:nvSpPr>
+          <p:cNvPr id="4" name="Date Placeholder 3"/>
           <p:cNvSpPr>
             <a:spLocks noGrp="1"/>
           </p:cNvSpPr>
@@ -2881,8 +2543,8 @@
         </p:nvSpPr>
         <p:spPr>
           <a:xfrm>
-            <a:off x="838200" y="6356350"/>
-            <a:ext cx="2743200" cy="365125"/>
+            <a:off x="640874" y="6780108"/>
+            <a:ext cx="2097405" cy="389467"/>
           </a:xfrm>
           <a:prstGeom prst="rect">
             <a:avLst/>
@@ -2892,7 +2554,7 @@
           <a:bodyPr vert="horz" lIns="91440" tIns="45720" rIns="91440" bIns="45720" rtlCol="0" anchor="ctr"/>
           <a:lstStyle>
             <a:lvl1pPr algn="l">
-              <a:defRPr sz="1200">
+              <a:defRPr sz="1223">
                 <a:solidFill>
                   <a:schemeClr val="tx1">
                     <a:tint val="75000"/>
@@ -2904,7 +2566,7 @@
           <a:p>
             <a:fld id="{D875D722-DF1E-D743-9707-4C36F8FB2F91}" type="datetimeFigureOut">
               <a:rPr lang="en-US" smtClean="0"/>
-              <a:t>9/22/23</a:t>
+              <a:t>7/17/25</a:t>
             </a:fld>
             <a:endParaRPr lang="en-US"/>
           </a:p>
@@ -2912,13 +2574,7 @@
       </p:sp>
       <p:sp>
         <p:nvSpPr>
-          <p:cNvPr id="5" name="Footer Placeholder 4">
-            <a:extLst>
-              <a:ext uri="{FF2B5EF4-FFF2-40B4-BE49-F238E27FC236}">
-                <a16:creationId xmlns:a16="http://schemas.microsoft.com/office/drawing/2014/main" id="{8D154F19-4C11-98A4-1218-2BC7CA9F7EF9}"/>
-              </a:ext>
-            </a:extLst>
-          </p:cNvPr>
+          <p:cNvPr id="5" name="Footer Placeholder 4"/>
           <p:cNvSpPr>
             <a:spLocks noGrp="1"/>
           </p:cNvSpPr>
@@ -2928,8 +2584,8 @@
         </p:nvSpPr>
         <p:spPr>
           <a:xfrm>
-            <a:off x="4038600" y="6356350"/>
-            <a:ext cx="4114800" cy="365125"/>
+            <a:off x="3087846" y="6780108"/>
+            <a:ext cx="3146108" cy="389467"/>
           </a:xfrm>
           <a:prstGeom prst="rect">
             <a:avLst/>
@@ -2939,7 +2595,7 @@
           <a:bodyPr vert="horz" lIns="91440" tIns="45720" rIns="91440" bIns="45720" rtlCol="0" anchor="ctr"/>
           <a:lstStyle>
             <a:lvl1pPr algn="ctr">
-              <a:defRPr sz="1200">
+              <a:defRPr sz="1223">
                 <a:solidFill>
                   <a:schemeClr val="tx1">
                     <a:tint val="75000"/>
@@ -2955,13 +2611,7 @@
       </p:sp>
       <p:sp>
         <p:nvSpPr>
-          <p:cNvPr id="6" name="Slide Number Placeholder 5">
-            <a:extLst>
-              <a:ext uri="{FF2B5EF4-FFF2-40B4-BE49-F238E27FC236}">
-                <a16:creationId xmlns:a16="http://schemas.microsoft.com/office/drawing/2014/main" id="{D3028882-A00E-0663-C97A-E366AAE35420}"/>
-              </a:ext>
-            </a:extLst>
-          </p:cNvPr>
+          <p:cNvPr id="6" name="Slide Number Placeholder 5"/>
           <p:cNvSpPr>
             <a:spLocks noGrp="1"/>
           </p:cNvSpPr>
@@ -2971,8 +2621,8 @@
         </p:nvSpPr>
         <p:spPr>
           <a:xfrm>
-            <a:off x="8610600" y="6356350"/>
-            <a:ext cx="2743200" cy="365125"/>
+            <a:off x="6583521" y="6780108"/>
+            <a:ext cx="2097405" cy="389467"/>
           </a:xfrm>
           <a:prstGeom prst="rect">
             <a:avLst/>
@@ -2982,7 +2632,7 @@
           <a:bodyPr vert="horz" lIns="91440" tIns="45720" rIns="91440" bIns="45720" rtlCol="0" anchor="ctr"/>
           <a:lstStyle>
             <a:lvl1pPr algn="r">
-              <a:defRPr sz="1200">
+              <a:defRPr sz="1223">
                 <a:solidFill>
                   <a:schemeClr val="tx1">
                     <a:tint val="75000"/>
@@ -3003,27 +2653,27 @@
     </p:spTree>
     <p:extLst>
       <p:ext uri="{BB962C8B-B14F-4D97-AF65-F5344CB8AC3E}">
-        <p14:creationId xmlns:p14="http://schemas.microsoft.com/office/powerpoint/2010/main" val="3437176679"/>
+        <p14:creationId xmlns:p14="http://schemas.microsoft.com/office/powerpoint/2010/main" val="683100811"/>
       </p:ext>
     </p:extLst>
   </p:cSld>
   <p:clrMap bg1="lt1" tx1="dk1" bg2="lt2" tx2="dk2" accent1="accent1" accent2="accent2" accent3="accent3" accent4="accent4" accent5="accent5" accent6="accent6" hlink="hlink" folHlink="folHlink"/>
   <p:sldLayoutIdLst>
-    <p:sldLayoutId id="2147483649" r:id="rId1"/>
-    <p:sldLayoutId id="2147483650" r:id="rId2"/>
-    <p:sldLayoutId id="2147483651" r:id="rId3"/>
-    <p:sldLayoutId id="2147483652" r:id="rId4"/>
-    <p:sldLayoutId id="2147483653" r:id="rId5"/>
-    <p:sldLayoutId id="2147483654" r:id="rId6"/>
-    <p:sldLayoutId id="2147483655" r:id="rId7"/>
-    <p:sldLayoutId id="2147483656" r:id="rId8"/>
-    <p:sldLayoutId id="2147483657" r:id="rId9"/>
-    <p:sldLayoutId id="2147483658" r:id="rId10"/>
-    <p:sldLayoutId id="2147483659" r:id="rId11"/>
+    <p:sldLayoutId id="2147483661" r:id="rId1"/>
+    <p:sldLayoutId id="2147483662" r:id="rId2"/>
+    <p:sldLayoutId id="2147483663" r:id="rId3"/>
+    <p:sldLayoutId id="2147483664" r:id="rId4"/>
+    <p:sldLayoutId id="2147483665" r:id="rId5"/>
+    <p:sldLayoutId id="2147483666" r:id="rId6"/>
+    <p:sldLayoutId id="2147483667" r:id="rId7"/>
+    <p:sldLayoutId id="2147483668" r:id="rId8"/>
+    <p:sldLayoutId id="2147483669" r:id="rId9"/>
+    <p:sldLayoutId id="2147483670" r:id="rId10"/>
+    <p:sldLayoutId id="2147483671" r:id="rId11"/>
   </p:sldLayoutIdLst>
   <p:txStyles>
     <p:titleStyle>
-      <a:lvl1pPr algn="l" defTabSz="914400" rtl="0" eaLnBrk="1" latinLnBrk="0" hangingPunct="1">
+      <a:lvl1pPr algn="l" defTabSz="932139" rtl="0" eaLnBrk="1" latinLnBrk="0" hangingPunct="1">
         <a:lnSpc>
           <a:spcPct val="90000"/>
         </a:lnSpc>
@@ -3031,7 +2681,7 @@
           <a:spcPct val="0"/>
         </a:spcBef>
         <a:buNone/>
-        <a:defRPr sz="4400" kern="1200">
+        <a:defRPr sz="4485" kern="1200">
           <a:solidFill>
             <a:schemeClr val="tx1"/>
           </a:solidFill>
@@ -3042,16 +2692,16 @@
       </a:lvl1pPr>
     </p:titleStyle>
     <p:bodyStyle>
-      <a:lvl1pPr marL="228600" indent="-228600" algn="l" defTabSz="914400" rtl="0" eaLnBrk="1" latinLnBrk="0" hangingPunct="1">
+      <a:lvl1pPr marL="233035" indent="-233035" algn="l" defTabSz="932139" rtl="0" eaLnBrk="1" latinLnBrk="0" hangingPunct="1">
         <a:lnSpc>
           <a:spcPct val="90000"/>
         </a:lnSpc>
         <a:spcBef>
-          <a:spcPts val="1000"/>
+          <a:spcPts val="1019"/>
         </a:spcBef>
         <a:buFont typeface="Arial" panose="020B0604020202020204" pitchFamily="34" charset="0"/>
         <a:buChar char="•"/>
-        <a:defRPr sz="2800" kern="1200">
+        <a:defRPr sz="2854" kern="1200">
           <a:solidFill>
             <a:schemeClr val="tx1"/>
           </a:solidFill>
@@ -3060,16 +2710,16 @@
           <a:cs typeface="+mn-cs"/>
         </a:defRPr>
       </a:lvl1pPr>
-      <a:lvl2pPr marL="685800" indent="-228600" algn="l" defTabSz="914400" rtl="0" eaLnBrk="1" latinLnBrk="0" hangingPunct="1">
+      <a:lvl2pPr marL="699105" indent="-233035" algn="l" defTabSz="932139" rtl="0" eaLnBrk="1" latinLnBrk="0" hangingPunct="1">
         <a:lnSpc>
           <a:spcPct val="90000"/>
         </a:lnSpc>
         <a:spcBef>
-          <a:spcPts val="500"/>
+          <a:spcPts val="510"/>
         </a:spcBef>
         <a:buFont typeface="Arial" panose="020B0604020202020204" pitchFamily="34" charset="0"/>
         <a:buChar char="•"/>
-        <a:defRPr sz="2400" kern="1200">
+        <a:defRPr sz="2447" kern="1200">
           <a:solidFill>
             <a:schemeClr val="tx1"/>
           </a:solidFill>
@@ -3078,16 +2728,16 @@
           <a:cs typeface="+mn-cs"/>
         </a:defRPr>
       </a:lvl2pPr>
-      <a:lvl3pPr marL="1143000" indent="-228600" algn="l" defTabSz="914400" rtl="0" eaLnBrk="1" latinLnBrk="0" hangingPunct="1">
+      <a:lvl3pPr marL="1165174" indent="-233035" algn="l" defTabSz="932139" rtl="0" eaLnBrk="1" latinLnBrk="0" hangingPunct="1">
         <a:lnSpc>
           <a:spcPct val="90000"/>
         </a:lnSpc>
         <a:spcBef>
-          <a:spcPts val="500"/>
+          <a:spcPts val="510"/>
         </a:spcBef>
         <a:buFont typeface="Arial" panose="020B0604020202020204" pitchFamily="34" charset="0"/>
         <a:buChar char="•"/>
-        <a:defRPr sz="2000" kern="1200">
+        <a:defRPr sz="2039" kern="1200">
           <a:solidFill>
             <a:schemeClr val="tx1"/>
           </a:solidFill>
@@ -3096,16 +2746,16 @@
           <a:cs typeface="+mn-cs"/>
         </a:defRPr>
       </a:lvl3pPr>
-      <a:lvl4pPr marL="1600200" indent="-228600" algn="l" defTabSz="914400" rtl="0" eaLnBrk="1" latinLnBrk="0" hangingPunct="1">
+      <a:lvl4pPr marL="1631244" indent="-233035" algn="l" defTabSz="932139" rtl="0" eaLnBrk="1" latinLnBrk="0" hangingPunct="1">
         <a:lnSpc>
           <a:spcPct val="90000"/>
         </a:lnSpc>
         <a:spcBef>
-          <a:spcPts val="500"/>
+          <a:spcPts val="510"/>
         </a:spcBef>
         <a:buFont typeface="Arial" panose="020B0604020202020204" pitchFamily="34" charset="0"/>
         <a:buChar char="•"/>
-        <a:defRPr sz="1800" kern="1200">
+        <a:defRPr sz="1835" kern="1200">
           <a:solidFill>
             <a:schemeClr val="tx1"/>
           </a:solidFill>
@@ -3114,16 +2764,16 @@
           <a:cs typeface="+mn-cs"/>
         </a:defRPr>
       </a:lvl4pPr>
-      <a:lvl5pPr marL="2057400" indent="-228600" algn="l" defTabSz="914400" rtl="0" eaLnBrk="1" latinLnBrk="0" hangingPunct="1">
+      <a:lvl5pPr marL="2097314" indent="-233035" algn="l" defTabSz="932139" rtl="0" eaLnBrk="1" latinLnBrk="0" hangingPunct="1">
         <a:lnSpc>
           <a:spcPct val="90000"/>
         </a:lnSpc>
         <a:spcBef>
-          <a:spcPts val="500"/>
+          <a:spcPts val="510"/>
         </a:spcBef>
         <a:buFont typeface="Arial" panose="020B0604020202020204" pitchFamily="34" charset="0"/>
         <a:buChar char="•"/>
-        <a:defRPr sz="1800" kern="1200">
+        <a:defRPr sz="1835" kern="1200">
           <a:solidFill>
             <a:schemeClr val="tx1"/>
           </a:solidFill>
@@ -3132,16 +2782,16 @@
           <a:cs typeface="+mn-cs"/>
         </a:defRPr>
       </a:lvl5pPr>
-      <a:lvl6pPr marL="2514600" indent="-228600" algn="l" defTabSz="914400" rtl="0" eaLnBrk="1" latinLnBrk="0" hangingPunct="1">
+      <a:lvl6pPr marL="2563383" indent="-233035" algn="l" defTabSz="932139" rtl="0" eaLnBrk="1" latinLnBrk="0" hangingPunct="1">
         <a:lnSpc>
           <a:spcPct val="90000"/>
         </a:lnSpc>
         <a:spcBef>
-          <a:spcPts val="500"/>
+          <a:spcPts val="510"/>
         </a:spcBef>
         <a:buFont typeface="Arial" panose="020B0604020202020204" pitchFamily="34" charset="0"/>
         <a:buChar char="•"/>
-        <a:defRPr sz="1800" kern="1200">
+        <a:defRPr sz="1835" kern="1200">
           <a:solidFill>
             <a:schemeClr val="tx1"/>
           </a:solidFill>
@@ -3150,16 +2800,16 @@
           <a:cs typeface="+mn-cs"/>
         </a:defRPr>
       </a:lvl6pPr>
-      <a:lvl7pPr marL="2971800" indent="-228600" algn="l" defTabSz="914400" rtl="0" eaLnBrk="1" latinLnBrk="0" hangingPunct="1">
+      <a:lvl7pPr marL="3029453" indent="-233035" algn="l" defTabSz="932139" rtl="0" eaLnBrk="1" latinLnBrk="0" hangingPunct="1">
         <a:lnSpc>
           <a:spcPct val="90000"/>
         </a:lnSpc>
         <a:spcBef>
-          <a:spcPts val="500"/>
+          <a:spcPts val="510"/>
         </a:spcBef>
         <a:buFont typeface="Arial" panose="020B0604020202020204" pitchFamily="34" charset="0"/>
         <a:buChar char="•"/>
-        <a:defRPr sz="1800" kern="1200">
+        <a:defRPr sz="1835" kern="1200">
           <a:solidFill>
             <a:schemeClr val="tx1"/>
           </a:solidFill>
@@ -3168,16 +2818,16 @@
           <a:cs typeface="+mn-cs"/>
         </a:defRPr>
       </a:lvl7pPr>
-      <a:lvl8pPr marL="3429000" indent="-228600" algn="l" defTabSz="914400" rtl="0" eaLnBrk="1" latinLnBrk="0" hangingPunct="1">
+      <a:lvl8pPr marL="3495523" indent="-233035" algn="l" defTabSz="932139" rtl="0" eaLnBrk="1" latinLnBrk="0" hangingPunct="1">
         <a:lnSpc>
           <a:spcPct val="90000"/>
         </a:lnSpc>
         <a:spcBef>
-          <a:spcPts val="500"/>
+          <a:spcPts val="510"/>
         </a:spcBef>
         <a:buFont typeface="Arial" panose="020B0604020202020204" pitchFamily="34" charset="0"/>
         <a:buChar char="•"/>
-        <a:defRPr sz="1800" kern="1200">
+        <a:defRPr sz="1835" kern="1200">
           <a:solidFill>
             <a:schemeClr val="tx1"/>
           </a:solidFill>
@@ -3186,16 +2836,16 @@
           <a:cs typeface="+mn-cs"/>
         </a:defRPr>
       </a:lvl8pPr>
-      <a:lvl9pPr marL="3886200" indent="-228600" algn="l" defTabSz="914400" rtl="0" eaLnBrk="1" latinLnBrk="0" hangingPunct="1">
+      <a:lvl9pPr marL="3961592" indent="-233035" algn="l" defTabSz="932139" rtl="0" eaLnBrk="1" latinLnBrk="0" hangingPunct="1">
         <a:lnSpc>
           <a:spcPct val="90000"/>
         </a:lnSpc>
         <a:spcBef>
-          <a:spcPts val="500"/>
+          <a:spcPts val="510"/>
         </a:spcBef>
         <a:buFont typeface="Arial" panose="020B0604020202020204" pitchFamily="34" charset="0"/>
         <a:buChar char="•"/>
-        <a:defRPr sz="1800" kern="1200">
+        <a:defRPr sz="1835" kern="1200">
           <a:solidFill>
             <a:schemeClr val="tx1"/>
           </a:solidFill>
@@ -3209,8 +2859,8 @@
       <a:defPPr>
         <a:defRPr lang="en-US"/>
       </a:defPPr>
-      <a:lvl1pPr marL="0" algn="l" defTabSz="914400" rtl="0" eaLnBrk="1" latinLnBrk="0" hangingPunct="1">
-        <a:defRPr sz="1800" kern="1200">
+      <a:lvl1pPr marL="0" algn="l" defTabSz="932139" rtl="0" eaLnBrk="1" latinLnBrk="0" hangingPunct="1">
+        <a:defRPr sz="1835" kern="1200">
           <a:solidFill>
             <a:schemeClr val="tx1"/>
           </a:solidFill>
@@ -3219,8 +2869,8 @@
           <a:cs typeface="+mn-cs"/>
         </a:defRPr>
       </a:lvl1pPr>
-      <a:lvl2pPr marL="457200" algn="l" defTabSz="914400" rtl="0" eaLnBrk="1" latinLnBrk="0" hangingPunct="1">
-        <a:defRPr sz="1800" kern="1200">
+      <a:lvl2pPr marL="466070" algn="l" defTabSz="932139" rtl="0" eaLnBrk="1" latinLnBrk="0" hangingPunct="1">
+        <a:defRPr sz="1835" kern="1200">
           <a:solidFill>
             <a:schemeClr val="tx1"/>
           </a:solidFill>
@@ -3229,8 +2879,8 @@
           <a:cs typeface="+mn-cs"/>
         </a:defRPr>
       </a:lvl2pPr>
-      <a:lvl3pPr marL="914400" algn="l" defTabSz="914400" rtl="0" eaLnBrk="1" latinLnBrk="0" hangingPunct="1">
-        <a:defRPr sz="1800" kern="1200">
+      <a:lvl3pPr marL="932139" algn="l" defTabSz="932139" rtl="0" eaLnBrk="1" latinLnBrk="0" hangingPunct="1">
+        <a:defRPr sz="1835" kern="1200">
           <a:solidFill>
             <a:schemeClr val="tx1"/>
           </a:solidFill>
@@ -3239,8 +2889,8 @@
           <a:cs typeface="+mn-cs"/>
         </a:defRPr>
       </a:lvl3pPr>
-      <a:lvl4pPr marL="1371600" algn="l" defTabSz="914400" rtl="0" eaLnBrk="1" latinLnBrk="0" hangingPunct="1">
-        <a:defRPr sz="1800" kern="1200">
+      <a:lvl4pPr marL="1398209" algn="l" defTabSz="932139" rtl="0" eaLnBrk="1" latinLnBrk="0" hangingPunct="1">
+        <a:defRPr sz="1835" kern="1200">
           <a:solidFill>
             <a:schemeClr val="tx1"/>
           </a:solidFill>
@@ -3249,8 +2899,8 @@
           <a:cs typeface="+mn-cs"/>
         </a:defRPr>
       </a:lvl4pPr>
-      <a:lvl5pPr marL="1828800" algn="l" defTabSz="914400" rtl="0" eaLnBrk="1" latinLnBrk="0" hangingPunct="1">
-        <a:defRPr sz="1800" kern="1200">
+      <a:lvl5pPr marL="1864279" algn="l" defTabSz="932139" rtl="0" eaLnBrk="1" latinLnBrk="0" hangingPunct="1">
+        <a:defRPr sz="1835" kern="1200">
           <a:solidFill>
             <a:schemeClr val="tx1"/>
           </a:solidFill>
@@ -3259,8 +2909,8 @@
           <a:cs typeface="+mn-cs"/>
         </a:defRPr>
       </a:lvl5pPr>
-      <a:lvl6pPr marL="2286000" algn="l" defTabSz="914400" rtl="0" eaLnBrk="1" latinLnBrk="0" hangingPunct="1">
-        <a:defRPr sz="1800" kern="1200">
+      <a:lvl6pPr marL="2330348" algn="l" defTabSz="932139" rtl="0" eaLnBrk="1" latinLnBrk="0" hangingPunct="1">
+        <a:defRPr sz="1835" kern="1200">
           <a:solidFill>
             <a:schemeClr val="tx1"/>
           </a:solidFill>
@@ -3269,8 +2919,8 @@
           <a:cs typeface="+mn-cs"/>
         </a:defRPr>
       </a:lvl6pPr>
-      <a:lvl7pPr marL="2743200" algn="l" defTabSz="914400" rtl="0" eaLnBrk="1" latinLnBrk="0" hangingPunct="1">
-        <a:defRPr sz="1800" kern="1200">
+      <a:lvl7pPr marL="2796418" algn="l" defTabSz="932139" rtl="0" eaLnBrk="1" latinLnBrk="0" hangingPunct="1">
+        <a:defRPr sz="1835" kern="1200">
           <a:solidFill>
             <a:schemeClr val="tx1"/>
           </a:solidFill>
@@ -3279,8 +2929,8 @@
           <a:cs typeface="+mn-cs"/>
         </a:defRPr>
       </a:lvl7pPr>
-      <a:lvl8pPr marL="3200400" algn="l" defTabSz="914400" rtl="0" eaLnBrk="1" latinLnBrk="0" hangingPunct="1">
-        <a:defRPr sz="1800" kern="1200">
+      <a:lvl8pPr marL="3262488" algn="l" defTabSz="932139" rtl="0" eaLnBrk="1" latinLnBrk="0" hangingPunct="1">
+        <a:defRPr sz="1835" kern="1200">
           <a:solidFill>
             <a:schemeClr val="tx1"/>
           </a:solidFill>
@@ -3289,8 +2939,8 @@
           <a:cs typeface="+mn-cs"/>
         </a:defRPr>
       </a:lvl8pPr>
-      <a:lvl9pPr marL="3657600" algn="l" defTabSz="914400" rtl="0" eaLnBrk="1" latinLnBrk="0" hangingPunct="1">
-        <a:defRPr sz="1800" kern="1200">
+      <a:lvl9pPr marL="3728557" algn="l" defTabSz="932139" rtl="0" eaLnBrk="1" latinLnBrk="0" hangingPunct="1">
+        <a:defRPr sz="1835" kern="1200">
           <a:solidFill>
             <a:schemeClr val="tx1"/>
           </a:solidFill>
@@ -3343,8 +2993,8 @@
         </p:blipFill>
         <p:spPr>
           <a:xfrm>
-            <a:off x="-121347" y="-72723"/>
-            <a:ext cx="12712700" cy="8061199"/>
+            <a:off x="-1970937" y="-77571"/>
+            <a:ext cx="13560213" cy="8598612"/>
           </a:xfrm>
           <a:prstGeom prst="rect">
             <a:avLst/>
@@ -3373,8 +3023,8 @@
         </p:blipFill>
         <p:spPr>
           <a:xfrm>
-            <a:off x="2343807" y="295724"/>
-            <a:ext cx="1939635" cy="1074979"/>
+            <a:off x="658561" y="315440"/>
+            <a:ext cx="2068944" cy="1146644"/>
           </a:xfrm>
           <a:prstGeom prst="rect">
             <a:avLst/>
@@ -3395,8 +3045,8 @@
         </p:nvSpPr>
         <p:spPr>
           <a:xfrm>
-            <a:off x="3615537" y="1497152"/>
-            <a:ext cx="3219151" cy="707886"/>
+            <a:off x="2015073" y="1596962"/>
+            <a:ext cx="3422732" cy="748988"/>
           </a:xfrm>
           <a:prstGeom prst="rect">
             <a:avLst/>
@@ -3410,7 +3060,7 @@
           <a:lstStyle/>
           <a:p>
             <a:r>
-              <a:rPr lang="en-US" sz="4000" u="sng" dirty="0">
+              <a:rPr lang="en-US" sz="4267" u="sng" dirty="0">
                 <a:solidFill>
                   <a:schemeClr val="bg1"/>
                 </a:solidFill>
@@ -3436,8 +3086,8 @@
         </p:nvSpPr>
         <p:spPr>
           <a:xfrm>
-            <a:off x="3655070" y="2508460"/>
-            <a:ext cx="6088020" cy="3970318"/>
+            <a:off x="2057241" y="2675691"/>
+            <a:ext cx="6493888" cy="4228850"/>
           </a:xfrm>
           <a:prstGeom prst="rect">
             <a:avLst/>
@@ -3451,7 +3101,7 @@
           <a:lstStyle/>
           <a:p>
             <a:r>
-              <a:rPr lang="en-US" sz="1800" dirty="0">
+              <a:rPr lang="en-US" sz="1920" dirty="0">
                 <a:solidFill>
                   <a:schemeClr val="bg1"/>
                 </a:solidFill>
@@ -3462,12 +3112,12 @@
             </a:r>
           </a:p>
           <a:p>
-            <a:pPr marL="285750" indent="-285750">
+            <a:pPr marL="304810" indent="-304810">
               <a:buFont typeface="Wingdings" pitchFamily="2" charset="2"/>
               <a:buChar char="Ø"/>
             </a:pPr>
             <a:r>
-              <a:rPr lang="en-US" dirty="0">
+              <a:rPr lang="en-US" sz="1920" dirty="0">
                 <a:solidFill>
                   <a:schemeClr val="bg1"/>
                 </a:solidFill>
@@ -3478,7 +3128,7 @@
             </a:r>
           </a:p>
           <a:p>
-            <a:endParaRPr lang="en-US" dirty="0">
+            <a:endParaRPr lang="en-US" sz="1920" dirty="0">
               <a:solidFill>
                 <a:schemeClr val="bg1"/>
               </a:solidFill>
@@ -3488,7 +3138,7 @@
           </a:p>
           <a:p>
             <a:r>
-              <a:rPr lang="en-US" dirty="0">
+              <a:rPr lang="en-US" sz="1920" dirty="0">
                 <a:solidFill>
                   <a:schemeClr val="bg1"/>
                 </a:solidFill>
@@ -3499,12 +3149,12 @@
             </a:r>
           </a:p>
           <a:p>
-            <a:pPr marL="285750" indent="-285750">
+            <a:pPr marL="304810" indent="-304810">
               <a:buFont typeface="Wingdings" pitchFamily="2" charset="2"/>
               <a:buChar char="Ø"/>
             </a:pPr>
             <a:r>
-              <a:rPr lang="en-US" dirty="0">
+              <a:rPr lang="en-US" sz="1920" dirty="0">
                 <a:solidFill>
                   <a:schemeClr val="bg1"/>
                 </a:solidFill>
@@ -3513,7 +3163,13 @@
               </a:rPr>
               <a:t>Checkout our cumulative view!</a:t>
             </a:r>
-            <a:endParaRPr lang="en-US" sz="1800" dirty="0">
+          </a:p>
+          <a:p>
+            <a:pPr marL="304810" indent="-304810">
+              <a:buFont typeface="Wingdings" pitchFamily="2" charset="2"/>
+              <a:buChar char="Ø"/>
+            </a:pPr>
+            <a:endParaRPr lang="en-US" sz="1920" dirty="0">
               <a:solidFill>
                 <a:schemeClr val="bg1"/>
               </a:solidFill>
@@ -3522,11 +3178,31 @@
             </a:endParaRPr>
           </a:p>
           <a:p>
-            <a:pPr marL="285750" indent="-285750">
-              <a:buFont typeface="Wingdings" pitchFamily="2" charset="2"/>
-              <a:buChar char="Ø"/>
-            </a:pPr>
-            <a:endParaRPr lang="en-US" dirty="0">
+            <a:r>
+              <a:rPr lang="en-US" sz="1920" u="sng" dirty="0">
+                <a:solidFill>
+                  <a:schemeClr val="bg1"/>
+                </a:solidFill>
+                <a:latin typeface="Baloo Bhaijaan" panose="03080902040302020200" pitchFamily="66" charset="-78"/>
+                <a:cs typeface="Baloo Bhaijaan" panose="03080902040302020200" pitchFamily="66" charset="-78"/>
+              </a:rPr>
+              <a:t>How to upload files:</a:t>
+            </a:r>
+          </a:p>
+          <a:p>
+            <a:r>
+              <a:rPr lang="en-US" sz="1920" dirty="0">
+                <a:solidFill>
+                  <a:schemeClr val="bg1"/>
+                </a:solidFill>
+                <a:latin typeface="Baloo Bhaijaan" panose="03080902040302020200" pitchFamily="66" charset="-78"/>
+                <a:cs typeface="Baloo Bhaijaan" panose="03080902040302020200" pitchFamily="66" charset="-78"/>
+              </a:rPr>
+              <a:t>Uploading files appends the data to the current existing table, so you can view uploaded data within class view, or look at how it fits into selection condition view.</a:t>
+            </a:r>
+          </a:p>
+          <a:p>
+            <a:endParaRPr lang="en-US" sz="1920" dirty="0">
               <a:solidFill>
                 <a:schemeClr val="bg1"/>
               </a:solidFill>
@@ -3536,50 +3212,7 @@
           </a:p>
           <a:p>
             <a:r>
-              <a:rPr lang="en-US" sz="1800" u="sng" dirty="0">
-                <a:solidFill>
-                  <a:schemeClr val="bg1"/>
-                </a:solidFill>
-                <a:latin typeface="Baloo Bhaijaan" panose="03080902040302020200" pitchFamily="66" charset="-78"/>
-                <a:cs typeface="Baloo Bhaijaan" panose="03080902040302020200" pitchFamily="66" charset="-78"/>
-              </a:rPr>
-              <a:t>How to upload </a:t>
-            </a:r>
-            <a:r>
-              <a:rPr lang="en-US" u="sng" dirty="0">
-                <a:solidFill>
-                  <a:schemeClr val="bg1"/>
-                </a:solidFill>
-                <a:latin typeface="Baloo Bhaijaan" panose="03080902040302020200" pitchFamily="66" charset="-78"/>
-                <a:cs typeface="Baloo Bhaijaan" panose="03080902040302020200" pitchFamily="66" charset="-78"/>
-              </a:rPr>
-              <a:t>files:</a:t>
-            </a:r>
-          </a:p>
-          <a:p>
-            <a:r>
-              <a:rPr lang="en-US" sz="1800" dirty="0">
-                <a:solidFill>
-                  <a:schemeClr val="bg1"/>
-                </a:solidFill>
-                <a:latin typeface="Baloo Bhaijaan" panose="03080902040302020200" pitchFamily="66" charset="-78"/>
-                <a:cs typeface="Baloo Bhaijaan" panose="03080902040302020200" pitchFamily="66" charset="-78"/>
-              </a:rPr>
-              <a:t>Uploading files appends the data to the current existing table, so you can view uploaded data within class view, or look at how it fits into cumulative view.</a:t>
-            </a:r>
-          </a:p>
-          <a:p>
-            <a:endParaRPr lang="en-US" dirty="0">
-              <a:solidFill>
-                <a:schemeClr val="bg1"/>
-              </a:solidFill>
-              <a:latin typeface="Baloo Bhaijaan" panose="03080902040302020200" pitchFamily="66" charset="-78"/>
-              <a:cs typeface="Baloo Bhaijaan" panose="03080902040302020200" pitchFamily="66" charset="-78"/>
-            </a:endParaRPr>
-          </a:p>
-          <a:p>
-            <a:r>
-              <a:rPr lang="en-US" sz="1800" dirty="0">
+              <a:rPr lang="en-US" sz="1920" dirty="0">
                 <a:solidFill>
                   <a:schemeClr val="bg1"/>
                 </a:solidFill>
@@ -3605,9 +3238,9 @@
 </file>
 
 <file path=ppt/theme/theme1.xml><?xml version="1.0" encoding="utf-8"?>
-<a:theme xmlns:a="http://schemas.openxmlformats.org/drawingml/2006/main" name="Office Theme">
+<a:theme xmlns:a="http://schemas.openxmlformats.org/drawingml/2006/main" name="Office 2013 - 2022 Theme">
   <a:themeElements>
-    <a:clrScheme name="Office">
+    <a:clrScheme name="Office 2013 - 2022 Theme">
       <a:dk1>
         <a:sysClr val="windowText" lastClr="000000"/>
       </a:dk1>
@@ -3645,7 +3278,7 @@
         <a:srgbClr val="954F72"/>
       </a:folHlink>
     </a:clrScheme>
-    <a:fontScheme name="Office">
+    <a:fontScheme name="Office 2013 - 2022 Theme">
       <a:majorFont>
         <a:latin typeface="Calibri Light" panose="020F0302020204030204"/>
         <a:ea typeface=""/>
@@ -3680,23 +3313,6 @@
         <a:font script="Viet" typeface="Times New Roman"/>
         <a:font script="Uigh" typeface="Microsoft Uighur"/>
         <a:font script="Geor" typeface="Sylfaen"/>
-        <a:font script="Armn" typeface="Arial"/>
-        <a:font script="Bugi" typeface="Leelawadee UI"/>
-        <a:font script="Bopo" typeface="Microsoft JhengHei"/>
-        <a:font script="Java" typeface="Javanese Text"/>
-        <a:font script="Lisu" typeface="Segoe UI"/>
-        <a:font script="Mymr" typeface="Myanmar Text"/>
-        <a:font script="Nkoo" typeface="Ebrima"/>
-        <a:font script="Olck" typeface="Nirmala UI"/>
-        <a:font script="Osma" typeface="Ebrima"/>
-        <a:font script="Phag" typeface="Phagspa"/>
-        <a:font script="Syrn" typeface="Estrangelo Edessa"/>
-        <a:font script="Syrj" typeface="Estrangelo Edessa"/>
-        <a:font script="Syre" typeface="Estrangelo Edessa"/>
-        <a:font script="Sora" typeface="Nirmala UI"/>
-        <a:font script="Tale" typeface="Microsoft Tai Le"/>
-        <a:font script="Talu" typeface="Microsoft New Tai Lue"/>
-        <a:font script="Tfng" typeface="Ebrima"/>
       </a:majorFont>
       <a:minorFont>
         <a:latin typeface="Calibri" panose="020F0502020204030204"/>
@@ -3732,26 +3348,9 @@
         <a:font script="Viet" typeface="Arial"/>
         <a:font script="Uigh" typeface="Microsoft Uighur"/>
         <a:font script="Geor" typeface="Sylfaen"/>
-        <a:font script="Armn" typeface="Arial"/>
-        <a:font script="Bugi" typeface="Leelawadee UI"/>
-        <a:font script="Bopo" typeface="Microsoft JhengHei"/>
-        <a:font script="Java" typeface="Javanese Text"/>
-        <a:font script="Lisu" typeface="Segoe UI"/>
-        <a:font script="Mymr" typeface="Myanmar Text"/>
-        <a:font script="Nkoo" typeface="Ebrima"/>
-        <a:font script="Olck" typeface="Nirmala UI"/>
-        <a:font script="Osma" typeface="Ebrima"/>
-        <a:font script="Phag" typeface="Phagspa"/>
-        <a:font script="Syrn" typeface="Estrangelo Edessa"/>
-        <a:font script="Syrj" typeface="Estrangelo Edessa"/>
-        <a:font script="Syre" typeface="Estrangelo Edessa"/>
-        <a:font script="Sora" typeface="Nirmala UI"/>
-        <a:font script="Tale" typeface="Microsoft Tai Le"/>
-        <a:font script="Talu" typeface="Microsoft New Tai Lue"/>
-        <a:font script="Tfng" typeface="Ebrima"/>
       </a:minorFont>
     </a:fontScheme>
-    <a:fmtScheme name="Office">
+    <a:fmtScheme name="Office 2013 - 2022 Theme">
       <a:fillStyleLst>
         <a:solidFill>
           <a:schemeClr val="phClr"/>
@@ -3893,7 +3492,7 @@
   <a:extraClrSchemeLst/>
   <a:extLst>
     <a:ext uri="{05A4C25C-085E-4340-85A3-A5531E510DB2}">
-      <thm15:themeFamily xmlns:thm15="http://schemas.microsoft.com/office/thememl/2012/main" name="Office Theme" id="{62F939B6-93AF-4DB8-9C6B-D6C7DFDC589F}" vid="{4A3C46E8-61CC-4603-A589-7422A47A8E4A}"/>
+      <thm15:themeFamily xmlns:thm15="http://schemas.microsoft.com/office/thememl/2012/main" name="Office 2013 - 2022 Theme" id="{62F939B6-93AF-4DB8-9C6B-D6C7DFDC589F}" vid="{4A3C46E8-61CC-4603-A589-7422A47A8E4A}"/>
     </a:ext>
   </a:extLst>
 </a:theme>
